--- a/presentations/NS_L07_TrafficFlood_Lesson.pptx
+++ b/presentations/NS_L07_TrafficFlood_Lesson.pptx
@@ -19,9 +19,10 @@
     <p:sldId id="267" r:id="rId13"/>
     <p:sldId id="268" r:id="rId14"/>
     <p:sldId id="269" r:id="rId15"/>
+    <p:sldId id="270" r:id="rId16"/>
   </p:sldIdLst>
   <p:notesMasterIdLst>
-    <p:notesMasterId r:id="rId16"/>
+    <p:notesMasterId r:id="rId17"/>
   </p:notesMasterIdLst>
   <p:sldSz cx="12192000" cy="6858000"/>
   <p:notesSz cx="6858000" cy="12192000"/>
@@ -692,7 +693,13 @@
           <a:p>
             <a:r>
               <a:rPr lang="en-US" dirty="0"/>
-              <a:t>Make them commit to an answer on paper before they tap the star. Guessing first costs them the learning.</a:t>
+              <a:t>The answer is C: Without DNS, browsers couldn't turn domain names into IP addresses.
+Do not say it yet. Every pupil commits first - fingers, whiteboards or a show of hands on each letter in turn - and you count the split before anyone can change their mind.
+IF MOST OF THE CLASS IS RIGHT: say why it is right in one sentence and go straight on to the independent work.
+IF A SIGNIFICANT GROUP IS ON ONE WRONG LETTER: that option is the misconception to teach against before anyone goes on. Go back to station 3, 21 October 2016, and work through its example again, aloud, with the class watching, then re-ask this question.
+The course's own response to a wrong answer here: The sites were still running; nobody could find them.
+A limitation, stated rather than papered over: one response covers every wrong option; it does not say what to revisit for each one. The course does not record what each separate wrong option means, and this slide does not invent it. Decide your own reteach for each option before the lesson; the options above are the start of it.
+This is a real activity from the experience (ns-l07-s3-c2), so the wording here is the wording a pupil will see.</a:t>
             </a:r>
             <a:endParaRPr lang="en-US" dirty="0"/>
           </a:p>
@@ -780,7 +787,7 @@
           <a:p>
             <a:r>
               <a:rPr lang="en-US" dirty="0"/>
-              <a:t>Use these as a settler, or as something for early finishers to read in the experience.</a:t>
+              <a:t>Make them commit to an answer on paper before they tap the star. Guessing first costs them the learning.</a:t>
             </a:r>
             <a:endParaRPr lang="en-US" dirty="0"/>
           </a:p>
@@ -868,7 +875,7 @@
           <a:p>
             <a:r>
               <a:rPr lang="en-US" dirty="0"/>
-              <a:t>Timed and silent. Mark against the answer sheet, then ask students to record their weakest area.</a:t>
+              <a:t>Use these as a settler, or as something for early finishers to read in the experience.</a:t>
             </a:r>
             <a:endParaRPr lang="en-US" dirty="0"/>
           </a:p>
@@ -956,7 +963,7 @@
           <a:p>
             <a:r>
               <a:rPr lang="en-US" dirty="0"/>
-              <a:t>Students copy their score-screen breakdown onto the worksheet, then rate themselves here.</a:t>
+              <a:t>Timed and silent. Mark against the answer sheet, then ask students to record their weakest area.</a:t>
             </a:r>
             <a:endParaRPr lang="en-US" dirty="0"/>
           </a:p>
@@ -980,6 +987,94 @@
             <a:fld id="{F7021451-1387-4CA6-816F-3879F97B5CBC}" type="slidenum">
               <a:rPr lang="en-US"/>
               <a:t>14</a:t>
+            </a:fld>
+            <a:endParaRPr lang="en-US"/>
+          </a:p>
+        </p:txBody>
+      </p:sp>
+    </p:spTree>
+    <p:extLst>
+      <p:ext uri="{BB962C8B-B14F-4D97-AF65-F5344CB8AC3E}">
+        <p14:creationId xmlns:p14="http://schemas.microsoft.com/office/powerpoint/2010/main" val="1024086991"/>
+      </p:ext>
+    </p:extLst>
+  </p:cSld>
+  <p:clrMapOvr>
+    <a:masterClrMapping/>
+  </p:clrMapOvr>
+</p:notes>
+</file>
+
+<file path=ppt/notesSlides/notesSlide15.xml><?xml version="1.0" encoding="utf-8"?>
+<p:notes xmlns:a="http://schemas.openxmlformats.org/drawingml/2006/main" xmlns:r="http://schemas.openxmlformats.org/officeDocument/2006/relationships" xmlns:p="http://schemas.openxmlformats.org/presentationml/2006/main">
+  <p:cSld>
+    <p:spTree>
+      <p:nvGrpSpPr>
+        <p:cNvPr id="1" name=""/>
+        <p:cNvGrpSpPr/>
+        <p:nvPr/>
+      </p:nvGrpSpPr>
+      <p:grpSpPr>
+        <a:xfrm>
+          <a:off x="0" y="0"/>
+          <a:ext cx="0" cy="0"/>
+          <a:chOff x="0" y="0"/>
+          <a:chExt cx="0" cy="0"/>
+        </a:xfrm>
+      </p:grpSpPr>
+      <p:sp>
+        <p:nvSpPr>
+          <p:cNvPr id="2" name="Slide Image Placeholder 1"/>
+          <p:cNvSpPr>
+            <a:spLocks noGrp="1" noRot="1" noChangeAspect="1"/>
+          </p:cNvSpPr>
+          <p:nvPr>
+            <p:ph type="sldImg"/>
+          </p:nvPr>
+        </p:nvSpPr>
+        <p:spPr/>
+      </p:sp>
+      <p:sp>
+        <p:nvSpPr>
+          <p:cNvPr id="3" name="Notes Placeholder 2"/>
+          <p:cNvSpPr>
+            <a:spLocks noGrp="1"/>
+          </p:cNvSpPr>
+          <p:nvPr>
+            <p:ph type="body" idx="1"/>
+          </p:nvPr>
+        </p:nvSpPr>
+        <p:spPr/>
+        <p:txBody>
+          <a:bodyPr/>
+          <a:lstStyle/>
+          <a:p>
+            <a:r>
+              <a:rPr lang="en-US" dirty="0"/>
+              <a:t>Students copy their score-screen breakdown onto the worksheet, then rate themselves here.</a:t>
+            </a:r>
+            <a:endParaRPr lang="en-US" dirty="0"/>
+          </a:p>
+        </p:txBody>
+      </p:sp>
+      <p:sp>
+        <p:nvSpPr>
+          <p:cNvPr id="4" name="Slide Number Placeholder 3"/>
+          <p:cNvSpPr>
+            <a:spLocks noGrp="1"/>
+          </p:cNvSpPr>
+          <p:nvPr>
+            <p:ph type="sldNum" sz="quarter" idx="10"/>
+          </p:nvPr>
+        </p:nvSpPr>
+        <p:spPr/>
+        <p:txBody>
+          <a:bodyPr/>
+          <a:lstStyle/>
+          <a:p>
+            <a:fld id="{F7021451-1387-4CA6-816F-3879F97B5CBC}" type="slidenum">
+              <a:rPr lang="en-US"/>
+              <a:t>15</a:t>
             </a:fld>
             <a:endParaRPr lang="en-US"/>
           </a:p>
@@ -2949,12 +3044,12 @@
         </p:nvSpPr>
         <p:spPr>
           <a:xfrm>
-            <a:off x="502920" y="438912"/>
-            <a:ext cx="3108960" cy="502920"/>
+            <a:off x="502920" y="457200"/>
+            <a:ext cx="1051560" cy="420624"/>
           </a:xfrm>
           <a:prstGeom prst="roundRect">
             <a:avLst>
-              <a:gd name="adj" fmla="val 18182"/>
+              <a:gd name="adj" fmla="val 21739"/>
             </a:avLst>
           </a:prstGeom>
           <a:solidFill>
@@ -2971,8 +3066,8 @@
         </p:nvSpPr>
         <p:spPr>
           <a:xfrm>
-            <a:off x="502920" y="438912"/>
-            <a:ext cx="3108960" cy="502920"/>
+            <a:off x="502920" y="457200"/>
+            <a:ext cx="1051560" cy="420624"/>
           </a:xfrm>
           <a:prstGeom prst="rect">
             <a:avLst/>
@@ -2988,7 +3083,7 @@
               <a:buNone/>
             </a:pPr>
             <a:r>
-              <a:rPr lang="en-US" sz="1300" b="1" dirty="0">
+              <a:rPr lang="en-US" sz="1200" b="1" dirty="0">
                 <a:solidFill>
                   <a:srgbClr val="101828"/>
                 </a:solidFill>
@@ -2996,9 +3091,9 @@
                 <a:ea typeface="IBM Plex Mono" pitchFamily="34" charset="-122"/>
                 <a:cs typeface="IBM Plex Mono" pitchFamily="34" charset="-120"/>
               </a:rPr>
-              <a:t>★  FINAL CHALLENGE</a:t>
-            </a:r>
-            <a:endParaRPr lang="en-US" sz="1300" dirty="0"/>
+              <a:t>CHECK</a:t>
+            </a:r>
+            <a:endParaRPr lang="en-US" sz="1200" dirty="0"/>
           </a:p>
         </p:txBody>
       </p:sp>
@@ -3010,8 +3105,8 @@
         </p:nvSpPr>
         <p:spPr>
           <a:xfrm>
-            <a:off x="502920" y="1097280"/>
-            <a:ext cx="11155680" cy="731520"/>
+            <a:off x="1737360" y="457200"/>
+            <a:ext cx="9875520" cy="420624"/>
           </a:xfrm>
           <a:prstGeom prst="rect">
             <a:avLst/>
@@ -3027,34 +3122,76 @@
               <a:buNone/>
             </a:pPr>
             <a:r>
-              <a:rPr lang="en-US" sz="3400" b="1" dirty="0">
-                <a:solidFill>
-                  <a:srgbClr val="101828"/>
+              <a:rPr lang="en-US" sz="1500" dirty="0">
+                <a:solidFill>
+                  <a:srgbClr val="667085"/>
                 </a:solidFill>
                 <a:latin typeface="IBM Plex Sans" pitchFamily="34" charset="0"/>
                 <a:ea typeface="IBM Plex Sans" pitchFamily="34" charset="-122"/>
                 <a:cs typeface="IBM Plex Sans" pitchFamily="34" charset="-120"/>
               </a:rPr>
-              <a:t>The anatomy of a DDoS</a:t>
-            </a:r>
-            <a:endParaRPr lang="en-US" sz="3400" dirty="0"/>
-          </a:p>
-        </p:txBody>
-      </p:sp>
-      <p:sp>
-        <p:nvSpPr>
-          <p:cNvPr id="8" name="Shape 6"/>
+              <a:t>Hands down. Everyone commits.</a:t>
+            </a:r>
+            <a:endParaRPr lang="en-US" sz="1500" dirty="0"/>
+          </a:p>
+        </p:txBody>
+      </p:sp>
+      <p:sp>
+        <p:nvSpPr>
+          <p:cNvPr id="8" name="Text 6"/>
+          <p:cNvSpPr txBox="1"/>
+          <p:nvPr/>
+        </p:nvSpPr>
+        <p:spPr>
+          <a:xfrm>
+            <a:off x="502920" y="1097280"/>
+            <a:ext cx="11155680" cy="914400"/>
+          </a:xfrm>
+          <a:prstGeom prst="rect">
+            <a:avLst/>
+          </a:prstGeom>
+          <a:noFill/>
+          <a:ln/>
+        </p:spPr>
+        <p:txBody>
+          <a:bodyPr wrap="square" lIns="0" tIns="0" rIns="0" bIns="0" rtlCol="0" anchor="ctr"/>
+          <a:lstStyle/>
+          <a:p>
+            <a:pPr indent="0" marL="0">
+              <a:lnSpc>
+                <a:spcPct val="115000"/>
+              </a:lnSpc>
+              <a:buNone/>
+            </a:pPr>
+            <a:r>
+              <a:rPr lang="en-US" sz="2600" b="1" dirty="0">
+                <a:solidFill>
+                  <a:srgbClr val="101828"/>
+                </a:solidFill>
+                <a:latin typeface="IBM Plex Sans" pitchFamily="34" charset="0"/>
+                <a:ea typeface="IBM Plex Sans" pitchFamily="34" charset="-122"/>
+                <a:cs typeface="IBM Plex Sans" pitchFamily="34" charset="-120"/>
+              </a:rPr>
+              <a:t>Why did attacking a DNS provider knock out so many sites?</a:t>
+            </a:r>
+            <a:endParaRPr lang="en-US" sz="2600" dirty="0"/>
+          </a:p>
+        </p:txBody>
+      </p:sp>
+      <p:sp>
+        <p:nvSpPr>
+          <p:cNvPr id="9" name="Shape 7"/>
           <p:cNvSpPr/>
           <p:nvPr/>
         </p:nvSpPr>
         <p:spPr>
           <a:xfrm>
-            <a:off x="502920" y="2011680"/>
-            <a:ext cx="11155680" cy="2194560"/>
+            <a:off x="502920" y="2148840"/>
+            <a:ext cx="11155680" cy="731520"/>
           </a:xfrm>
           <a:prstGeom prst="roundRect">
             <a:avLst>
-              <a:gd name="adj" fmla="val 5000"/>
+              <a:gd name="adj" fmla="val 15000"/>
             </a:avLst>
           </a:prstGeom>
           <a:solidFill>
@@ -3062,7 +3199,7 @@
           </a:solidFill>
           <a:ln w="15875">
             <a:solidFill>
-              <a:srgbClr val="2D63FF"/>
+              <a:srgbClr val="D9DEE7"/>
             </a:solidFill>
             <a:prstDash val="solid"/>
           </a:ln>
@@ -3070,14 +3207,75 @@
       </p:sp>
       <p:sp>
         <p:nvSpPr>
-          <p:cNvPr id="9" name="Text 7"/>
-          <p:cNvSpPr txBox="1"/>
-          <p:nvPr/>
-        </p:nvSpPr>
-        <p:spPr>
-          <a:xfrm>
-            <a:off x="1005840" y="2331720"/>
-            <a:ext cx="10149840" cy="1554480"/>
+          <p:cNvPr id="10" name="Shape 8"/>
+          <p:cNvSpPr/>
+          <p:nvPr/>
+        </p:nvSpPr>
+        <p:spPr>
+          <a:xfrm>
+            <a:off x="777240" y="2295144"/>
+            <a:ext cx="438912" cy="438912"/>
+          </a:xfrm>
+          <a:prstGeom prst="roundRect">
+            <a:avLst>
+              <a:gd name="adj" fmla="val 20833"/>
+            </a:avLst>
+          </a:prstGeom>
+          <a:solidFill>
+            <a:srgbClr val="EEF2FB"/>
+          </a:solidFill>
+          <a:ln/>
+        </p:spPr>
+      </p:sp>
+      <p:sp>
+        <p:nvSpPr>
+          <p:cNvPr id="11" name="Text 9"/>
+          <p:cNvSpPr txBox="1"/>
+          <p:nvPr/>
+        </p:nvSpPr>
+        <p:spPr>
+          <a:xfrm>
+            <a:off x="777240" y="2295144"/>
+            <a:ext cx="438912" cy="438912"/>
+          </a:xfrm>
+          <a:prstGeom prst="rect">
+            <a:avLst/>
+          </a:prstGeom>
+          <a:noFill/>
+          <a:ln/>
+        </p:spPr>
+        <p:txBody>
+          <a:bodyPr wrap="square" lIns="0" tIns="0" rIns="0" bIns="0" rtlCol="0" anchor="ctr"/>
+          <a:lstStyle/>
+          <a:p>
+            <a:pPr algn="ctr" indent="0" marL="0">
+              <a:buNone/>
+            </a:pPr>
+            <a:r>
+              <a:rPr lang="en-US" sz="1300" b="1" dirty="0">
+                <a:solidFill>
+                  <a:srgbClr val="2D63FF"/>
+                </a:solidFill>
+                <a:latin typeface="IBM Plex Mono" pitchFamily="34" charset="0"/>
+                <a:ea typeface="IBM Plex Mono" pitchFamily="34" charset="-122"/>
+                <a:cs typeface="IBM Plex Mono" pitchFamily="34" charset="-120"/>
+              </a:rPr>
+              <a:t>A</a:t>
+            </a:r>
+            <a:endParaRPr lang="en-US" sz="1300" dirty="0"/>
+          </a:p>
+        </p:txBody>
+      </p:sp>
+      <p:sp>
+        <p:nvSpPr>
+          <p:cNvPr id="12" name="Text 10"/>
+          <p:cNvSpPr txBox="1"/>
+          <p:nvPr/>
+        </p:nvSpPr>
+        <p:spPr>
+          <a:xfrm>
+            <a:off x="1417320" y="2148840"/>
+            <a:ext cx="10058400" cy="731520"/>
           </a:xfrm>
           <a:prstGeom prst="rect">
             <a:avLst/>
@@ -3091,12 +3289,12 @@
           <a:p>
             <a:pPr indent="0" marL="0">
               <a:lnSpc>
-                <a:spcPct val="130000"/>
+                <a:spcPct val="115000"/>
               </a:lnSpc>
               <a:buNone/>
             </a:pPr>
             <a:r>
-              <a:rPr lang="en-US" sz="2200" dirty="0">
+              <a:rPr lang="en-US" sz="1700" dirty="0">
                 <a:solidFill>
                   <a:srgbClr val="101828"/>
                 </a:solidFill>
@@ -3104,22 +3302,110 @@
                 <a:ea typeface="IBM Plex Sans" pitchFamily="34" charset="-122"/>
                 <a:cs typeface="IBM Plex Sans" pitchFamily="34" charset="-120"/>
               </a:rPr>
-              <a:t>Put the stages of a DDoS attack in the right order, from the attacker's first move to the website going offline.</a:t>
-            </a:r>
-            <a:endParaRPr lang="en-US" sz="2200" dirty="0"/>
-          </a:p>
-        </p:txBody>
-      </p:sp>
-      <p:sp>
-        <p:nvSpPr>
-          <p:cNvPr id="10" name="Text 8"/>
-          <p:cNvSpPr txBox="1"/>
-          <p:nvPr/>
-        </p:nvSpPr>
-        <p:spPr>
-          <a:xfrm>
-            <a:off x="502920" y="4526280"/>
-            <a:ext cx="11155680" cy="457200"/>
+              <a:t>It encrypted every web page</a:t>
+            </a:r>
+            <a:endParaRPr lang="en-US" sz="1700" dirty="0"/>
+          </a:p>
+        </p:txBody>
+      </p:sp>
+      <p:sp>
+        <p:nvSpPr>
+          <p:cNvPr id="13" name="Shape 11"/>
+          <p:cNvSpPr/>
+          <p:nvPr/>
+        </p:nvSpPr>
+        <p:spPr>
+          <a:xfrm>
+            <a:off x="502920" y="3017520"/>
+            <a:ext cx="11155680" cy="731520"/>
+          </a:xfrm>
+          <a:prstGeom prst="roundRect">
+            <a:avLst>
+              <a:gd name="adj" fmla="val 15000"/>
+            </a:avLst>
+          </a:prstGeom>
+          <a:solidFill>
+            <a:srgbClr val="FFFFFF"/>
+          </a:solidFill>
+          <a:ln w="15875">
+            <a:solidFill>
+              <a:srgbClr val="D9DEE7"/>
+            </a:solidFill>
+            <a:prstDash val="solid"/>
+          </a:ln>
+        </p:spPr>
+      </p:sp>
+      <p:sp>
+        <p:nvSpPr>
+          <p:cNvPr id="14" name="Shape 12"/>
+          <p:cNvSpPr/>
+          <p:nvPr/>
+        </p:nvSpPr>
+        <p:spPr>
+          <a:xfrm>
+            <a:off x="777240" y="3163824"/>
+            <a:ext cx="438912" cy="438912"/>
+          </a:xfrm>
+          <a:prstGeom prst="roundRect">
+            <a:avLst>
+              <a:gd name="adj" fmla="val 20833"/>
+            </a:avLst>
+          </a:prstGeom>
+          <a:solidFill>
+            <a:srgbClr val="EEF2FB"/>
+          </a:solidFill>
+          <a:ln/>
+        </p:spPr>
+      </p:sp>
+      <p:sp>
+        <p:nvSpPr>
+          <p:cNvPr id="15" name="Text 13"/>
+          <p:cNvSpPr txBox="1"/>
+          <p:nvPr/>
+        </p:nvSpPr>
+        <p:spPr>
+          <a:xfrm>
+            <a:off x="777240" y="3163824"/>
+            <a:ext cx="438912" cy="438912"/>
+          </a:xfrm>
+          <a:prstGeom prst="rect">
+            <a:avLst/>
+          </a:prstGeom>
+          <a:noFill/>
+          <a:ln/>
+        </p:spPr>
+        <p:txBody>
+          <a:bodyPr wrap="square" lIns="0" tIns="0" rIns="0" bIns="0" rtlCol="0" anchor="ctr"/>
+          <a:lstStyle/>
+          <a:p>
+            <a:pPr algn="ctr" indent="0" marL="0">
+              <a:buNone/>
+            </a:pPr>
+            <a:r>
+              <a:rPr lang="en-US" sz="1300" b="1" dirty="0">
+                <a:solidFill>
+                  <a:srgbClr val="2D63FF"/>
+                </a:solidFill>
+                <a:latin typeface="IBM Plex Mono" pitchFamily="34" charset="0"/>
+                <a:ea typeface="IBM Plex Mono" pitchFamily="34" charset="-122"/>
+                <a:cs typeface="IBM Plex Mono" pitchFamily="34" charset="-120"/>
+              </a:rPr>
+              <a:t>B</a:t>
+            </a:r>
+            <a:endParaRPr lang="en-US" sz="1300" dirty="0"/>
+          </a:p>
+        </p:txBody>
+      </p:sp>
+      <p:sp>
+        <p:nvSpPr>
+          <p:cNvPr id="16" name="Text 14"/>
+          <p:cNvSpPr txBox="1"/>
+          <p:nvPr/>
+        </p:nvSpPr>
+        <p:spPr>
+          <a:xfrm>
+            <a:off x="1417320" y="3017520"/>
+            <a:ext cx="10058400" cy="731520"/>
           </a:xfrm>
           <a:prstGeom prst="rect">
             <a:avLst/>
@@ -3132,20 +3418,283 @@
           <a:lstStyle/>
           <a:p>
             <a:pPr indent="0" marL="0">
-              <a:buNone/>
-            </a:pPr>
-            <a:r>
-              <a:rPr lang="en-US" sz="1600" dirty="0">
-                <a:solidFill>
-                  <a:srgbClr val="667085"/>
+              <a:lnSpc>
+                <a:spcPct val="115000"/>
+              </a:lnSpc>
+              <a:buNone/>
+            </a:pPr>
+            <a:r>
+              <a:rPr lang="en-US" sz="1700" dirty="0">
+                <a:solidFill>
+                  <a:srgbClr val="101828"/>
                 </a:solidFill>
                 <a:latin typeface="IBM Plex Sans" pitchFamily="34" charset="0"/>
                 <a:ea typeface="IBM Plex Sans" pitchFamily="34" charset="-122"/>
                 <a:cs typeface="IBM Plex Sans" pitchFamily="34" charset="-120"/>
               </a:rPr>
-              <a:t>Predict on paper first, then look down and test it.</a:t>
-            </a:r>
-            <a:endParaRPr lang="en-US" sz="1600" dirty="0"/>
+              <a:t>It switched off the undersea cables</a:t>
+            </a:r>
+            <a:endParaRPr lang="en-US" sz="1700" dirty="0"/>
+          </a:p>
+        </p:txBody>
+      </p:sp>
+      <p:sp>
+        <p:nvSpPr>
+          <p:cNvPr id="17" name="Shape 15"/>
+          <p:cNvSpPr/>
+          <p:nvPr/>
+        </p:nvSpPr>
+        <p:spPr>
+          <a:xfrm>
+            <a:off x="502920" y="3886200"/>
+            <a:ext cx="11155680" cy="731520"/>
+          </a:xfrm>
+          <a:prstGeom prst="roundRect">
+            <a:avLst>
+              <a:gd name="adj" fmla="val 15000"/>
+            </a:avLst>
+          </a:prstGeom>
+          <a:solidFill>
+            <a:srgbClr val="FFFFFF"/>
+          </a:solidFill>
+          <a:ln w="15875">
+            <a:solidFill>
+              <a:srgbClr val="D9DEE7"/>
+            </a:solidFill>
+            <a:prstDash val="solid"/>
+          </a:ln>
+        </p:spPr>
+      </p:sp>
+      <p:sp>
+        <p:nvSpPr>
+          <p:cNvPr id="18" name="Shape 16"/>
+          <p:cNvSpPr/>
+          <p:nvPr/>
+        </p:nvSpPr>
+        <p:spPr>
+          <a:xfrm>
+            <a:off x="777240" y="4032504"/>
+            <a:ext cx="438912" cy="438912"/>
+          </a:xfrm>
+          <a:prstGeom prst="roundRect">
+            <a:avLst>
+              <a:gd name="adj" fmla="val 20833"/>
+            </a:avLst>
+          </a:prstGeom>
+          <a:solidFill>
+            <a:srgbClr val="EEF2FB"/>
+          </a:solidFill>
+          <a:ln/>
+        </p:spPr>
+      </p:sp>
+      <p:sp>
+        <p:nvSpPr>
+          <p:cNvPr id="19" name="Text 17"/>
+          <p:cNvSpPr txBox="1"/>
+          <p:nvPr/>
+        </p:nvSpPr>
+        <p:spPr>
+          <a:xfrm>
+            <a:off x="777240" y="4032504"/>
+            <a:ext cx="438912" cy="438912"/>
+          </a:xfrm>
+          <a:prstGeom prst="rect">
+            <a:avLst/>
+          </a:prstGeom>
+          <a:noFill/>
+          <a:ln/>
+        </p:spPr>
+        <p:txBody>
+          <a:bodyPr wrap="square" lIns="0" tIns="0" rIns="0" bIns="0" rtlCol="0" anchor="ctr"/>
+          <a:lstStyle/>
+          <a:p>
+            <a:pPr algn="ctr" indent="0" marL="0">
+              <a:buNone/>
+            </a:pPr>
+            <a:r>
+              <a:rPr lang="en-US" sz="1300" b="1" dirty="0">
+                <a:solidFill>
+                  <a:srgbClr val="2D63FF"/>
+                </a:solidFill>
+                <a:latin typeface="IBM Plex Mono" pitchFamily="34" charset="0"/>
+                <a:ea typeface="IBM Plex Mono" pitchFamily="34" charset="-122"/>
+                <a:cs typeface="IBM Plex Mono" pitchFamily="34" charset="-120"/>
+              </a:rPr>
+              <a:t>C</a:t>
+            </a:r>
+            <a:endParaRPr lang="en-US" sz="1300" dirty="0"/>
+          </a:p>
+        </p:txBody>
+      </p:sp>
+      <p:sp>
+        <p:nvSpPr>
+          <p:cNvPr id="20" name="Text 18"/>
+          <p:cNvSpPr txBox="1"/>
+          <p:nvPr/>
+        </p:nvSpPr>
+        <p:spPr>
+          <a:xfrm>
+            <a:off x="1417320" y="3886200"/>
+            <a:ext cx="10058400" cy="731520"/>
+          </a:xfrm>
+          <a:prstGeom prst="rect">
+            <a:avLst/>
+          </a:prstGeom>
+          <a:noFill/>
+          <a:ln/>
+        </p:spPr>
+        <p:txBody>
+          <a:bodyPr wrap="square" lIns="0" tIns="0" rIns="0" bIns="0" rtlCol="0" anchor="ctr"/>
+          <a:lstStyle/>
+          <a:p>
+            <a:pPr indent="0" marL="0">
+              <a:lnSpc>
+                <a:spcPct val="115000"/>
+              </a:lnSpc>
+              <a:buNone/>
+            </a:pPr>
+            <a:r>
+              <a:rPr lang="en-US" sz="1700" dirty="0">
+                <a:solidFill>
+                  <a:srgbClr val="101828"/>
+                </a:solidFill>
+                <a:latin typeface="IBM Plex Sans" pitchFamily="34" charset="0"/>
+                <a:ea typeface="IBM Plex Sans" pitchFamily="34" charset="-122"/>
+                <a:cs typeface="IBM Plex Sans" pitchFamily="34" charset="-120"/>
+              </a:rPr>
+              <a:t>Without DNS, browsers couldn't turn domain names into IP addresses</a:t>
+            </a:r>
+            <a:endParaRPr lang="en-US" sz="1700" dirty="0"/>
+          </a:p>
+        </p:txBody>
+      </p:sp>
+      <p:sp>
+        <p:nvSpPr>
+          <p:cNvPr id="21" name="Shape 19"/>
+          <p:cNvSpPr/>
+          <p:nvPr/>
+        </p:nvSpPr>
+        <p:spPr>
+          <a:xfrm>
+            <a:off x="502920" y="4754880"/>
+            <a:ext cx="11155680" cy="731520"/>
+          </a:xfrm>
+          <a:prstGeom prst="roundRect">
+            <a:avLst>
+              <a:gd name="adj" fmla="val 15000"/>
+            </a:avLst>
+          </a:prstGeom>
+          <a:solidFill>
+            <a:srgbClr val="FFFFFF"/>
+          </a:solidFill>
+          <a:ln w="15875">
+            <a:solidFill>
+              <a:srgbClr val="D9DEE7"/>
+            </a:solidFill>
+            <a:prstDash val="solid"/>
+          </a:ln>
+        </p:spPr>
+      </p:sp>
+      <p:sp>
+        <p:nvSpPr>
+          <p:cNvPr id="22" name="Shape 20"/>
+          <p:cNvSpPr/>
+          <p:nvPr/>
+        </p:nvSpPr>
+        <p:spPr>
+          <a:xfrm>
+            <a:off x="777240" y="4901184"/>
+            <a:ext cx="438912" cy="438912"/>
+          </a:xfrm>
+          <a:prstGeom prst="roundRect">
+            <a:avLst>
+              <a:gd name="adj" fmla="val 20833"/>
+            </a:avLst>
+          </a:prstGeom>
+          <a:solidFill>
+            <a:srgbClr val="EEF2FB"/>
+          </a:solidFill>
+          <a:ln/>
+        </p:spPr>
+      </p:sp>
+      <p:sp>
+        <p:nvSpPr>
+          <p:cNvPr id="23" name="Text 21"/>
+          <p:cNvSpPr txBox="1"/>
+          <p:nvPr/>
+        </p:nvSpPr>
+        <p:spPr>
+          <a:xfrm>
+            <a:off x="777240" y="4901184"/>
+            <a:ext cx="438912" cy="438912"/>
+          </a:xfrm>
+          <a:prstGeom prst="rect">
+            <a:avLst/>
+          </a:prstGeom>
+          <a:noFill/>
+          <a:ln/>
+        </p:spPr>
+        <p:txBody>
+          <a:bodyPr wrap="square" lIns="0" tIns="0" rIns="0" bIns="0" rtlCol="0" anchor="ctr"/>
+          <a:lstStyle/>
+          <a:p>
+            <a:pPr algn="ctr" indent="0" marL="0">
+              <a:buNone/>
+            </a:pPr>
+            <a:r>
+              <a:rPr lang="en-US" sz="1300" b="1" dirty="0">
+                <a:solidFill>
+                  <a:srgbClr val="2D63FF"/>
+                </a:solidFill>
+                <a:latin typeface="IBM Plex Mono" pitchFamily="34" charset="0"/>
+                <a:ea typeface="IBM Plex Mono" pitchFamily="34" charset="-122"/>
+                <a:cs typeface="IBM Plex Mono" pitchFamily="34" charset="-120"/>
+              </a:rPr>
+              <a:t>D</a:t>
+            </a:r>
+            <a:endParaRPr lang="en-US" sz="1300" dirty="0"/>
+          </a:p>
+        </p:txBody>
+      </p:sp>
+      <p:sp>
+        <p:nvSpPr>
+          <p:cNvPr id="24" name="Text 22"/>
+          <p:cNvSpPr txBox="1"/>
+          <p:nvPr/>
+        </p:nvSpPr>
+        <p:spPr>
+          <a:xfrm>
+            <a:off x="1417320" y="4754880"/>
+            <a:ext cx="10058400" cy="731520"/>
+          </a:xfrm>
+          <a:prstGeom prst="rect">
+            <a:avLst/>
+          </a:prstGeom>
+          <a:noFill/>
+          <a:ln/>
+        </p:spPr>
+        <p:txBody>
+          <a:bodyPr wrap="square" lIns="0" tIns="0" rIns="0" bIns="0" rtlCol="0" anchor="ctr"/>
+          <a:lstStyle/>
+          <a:p>
+            <a:pPr indent="0" marL="0">
+              <a:lnSpc>
+                <a:spcPct val="115000"/>
+              </a:lnSpc>
+              <a:buNone/>
+            </a:pPr>
+            <a:r>
+              <a:rPr lang="en-US" sz="1700" dirty="0">
+                <a:solidFill>
+                  <a:srgbClr val="101828"/>
+                </a:solidFill>
+                <a:latin typeface="IBM Plex Sans" pitchFamily="34" charset="0"/>
+                <a:ea typeface="IBM Plex Sans" pitchFamily="34" charset="-122"/>
+                <a:cs typeface="IBM Plex Sans" pitchFamily="34" charset="-120"/>
+              </a:rPr>
+              <a:t>It deleted the websites</a:t>
+            </a:r>
+            <a:endParaRPr lang="en-US" sz="1700" dirty="0"/>
           </a:p>
         </p:txBody>
       </p:sp>
@@ -3281,14 +3830,75 @@
       </p:sp>
       <p:sp>
         <p:nvSpPr>
-          <p:cNvPr id="5" name="Text 3"/>
-          <p:cNvSpPr txBox="1"/>
-          <p:nvPr/>
-        </p:nvSpPr>
-        <p:spPr>
-          <a:xfrm>
-            <a:off x="502920" y="411480"/>
-            <a:ext cx="11155680" cy="777240"/>
+          <p:cNvPr id="5" name="Shape 3"/>
+          <p:cNvSpPr/>
+          <p:nvPr/>
+        </p:nvSpPr>
+        <p:spPr>
+          <a:xfrm>
+            <a:off x="502920" y="438912"/>
+            <a:ext cx="3108960" cy="502920"/>
+          </a:xfrm>
+          <a:prstGeom prst="roundRect">
+            <a:avLst>
+              <a:gd name="adj" fmla="val 18182"/>
+            </a:avLst>
+          </a:prstGeom>
+          <a:solidFill>
+            <a:srgbClr val="F4B942"/>
+          </a:solidFill>
+          <a:ln/>
+        </p:spPr>
+      </p:sp>
+      <p:sp>
+        <p:nvSpPr>
+          <p:cNvPr id="6" name="Text 4"/>
+          <p:cNvSpPr txBox="1"/>
+          <p:nvPr/>
+        </p:nvSpPr>
+        <p:spPr>
+          <a:xfrm>
+            <a:off x="502920" y="438912"/>
+            <a:ext cx="3108960" cy="502920"/>
+          </a:xfrm>
+          <a:prstGeom prst="rect">
+            <a:avLst/>
+          </a:prstGeom>
+          <a:noFill/>
+          <a:ln/>
+        </p:spPr>
+        <p:txBody>
+          <a:bodyPr wrap="square" lIns="0" tIns="0" rIns="0" bIns="0" rtlCol="0" anchor="ctr"/>
+          <a:lstStyle/>
+          <a:p>
+            <a:pPr algn="ctr" indent="0" marL="0">
+              <a:buNone/>
+            </a:pPr>
+            <a:r>
+              <a:rPr lang="en-US" sz="1300" b="1" dirty="0">
+                <a:solidFill>
+                  <a:srgbClr val="101828"/>
+                </a:solidFill>
+                <a:latin typeface="IBM Plex Mono" pitchFamily="34" charset="0"/>
+                <a:ea typeface="IBM Plex Mono" pitchFamily="34" charset="-122"/>
+                <a:cs typeface="IBM Plex Mono" pitchFamily="34" charset="-120"/>
+              </a:rPr>
+              <a:t>★  FINAL CHALLENGE</a:t>
+            </a:r>
+            <a:endParaRPr lang="en-US" sz="1300" dirty="0"/>
+          </a:p>
+        </p:txBody>
+      </p:sp>
+      <p:sp>
+        <p:nvSpPr>
+          <p:cNvPr id="7" name="Text 5"/>
+          <p:cNvSpPr txBox="1"/>
+          <p:nvPr/>
+        </p:nvSpPr>
+        <p:spPr>
+          <a:xfrm>
+            <a:off x="502920" y="1097280"/>
+            <a:ext cx="11155680" cy="731520"/>
           </a:xfrm>
           <a:prstGeom prst="rect">
             <a:avLst/>
@@ -3304,7 +3914,7 @@
               <a:buNone/>
             </a:pPr>
             <a:r>
-              <a:rPr lang="en-US" sz="3200" b="1" dirty="0">
+              <a:rPr lang="en-US" sz="3400" b="1" dirty="0">
                 <a:solidFill>
                   <a:srgbClr val="101828"/>
                 </a:solidFill>
@@ -3312,65 +3922,26 @@
                 <a:ea typeface="IBM Plex Sans" pitchFamily="34" charset="-122"/>
                 <a:cs typeface="IBM Plex Sans" pitchFamily="34" charset="-120"/>
               </a:rPr>
-              <a:t>Worth knowing</a:t>
-            </a:r>
-            <a:endParaRPr lang="en-US" sz="3200" dirty="0"/>
-          </a:p>
-        </p:txBody>
-      </p:sp>
-      <p:sp>
-        <p:nvSpPr>
-          <p:cNvPr id="6" name="Text 4"/>
-          <p:cNvSpPr txBox="1"/>
-          <p:nvPr/>
-        </p:nvSpPr>
-        <p:spPr>
-          <a:xfrm>
-            <a:off x="502920" y="1170432"/>
-            <a:ext cx="11155680" cy="411480"/>
-          </a:xfrm>
-          <a:prstGeom prst="rect">
-            <a:avLst/>
-          </a:prstGeom>
-          <a:noFill/>
-          <a:ln/>
-        </p:spPr>
-        <p:txBody>
-          <a:bodyPr wrap="square" lIns="0" tIns="0" rIns="0" bIns="0" rtlCol="0" anchor="ctr"/>
-          <a:lstStyle/>
-          <a:p>
-            <a:pPr indent="0" marL="0">
-              <a:buNone/>
-            </a:pPr>
-            <a:r>
-              <a:rPr lang="en-US" sz="1500" dirty="0">
-                <a:solidFill>
-                  <a:srgbClr val="667085"/>
-                </a:solidFill>
-                <a:latin typeface="IBM Plex Sans" pitchFamily="34" charset="0"/>
-                <a:ea typeface="IBM Plex Sans" pitchFamily="34" charset="-122"/>
-                <a:cs typeface="IBM Plex Sans" pitchFamily="34" charset="-120"/>
-              </a:rPr>
-              <a:t>The information markers dotted around the room</a:t>
-            </a:r>
-            <a:endParaRPr lang="en-US" sz="1500" dirty="0"/>
-          </a:p>
-        </p:txBody>
-      </p:sp>
-      <p:sp>
-        <p:nvSpPr>
-          <p:cNvPr id="7" name="Shape 5"/>
+              <a:t>The anatomy of a DDoS</a:t>
+            </a:r>
+            <a:endParaRPr lang="en-US" sz="3400" dirty="0"/>
+          </a:p>
+        </p:txBody>
+      </p:sp>
+      <p:sp>
+        <p:nvSpPr>
+          <p:cNvPr id="8" name="Shape 6"/>
           <p:cNvSpPr/>
           <p:nvPr/>
         </p:nvSpPr>
         <p:spPr>
           <a:xfrm>
-            <a:off x="502920" y="1828800"/>
-            <a:ext cx="5394960" cy="1737360"/>
+            <a:off x="502920" y="2011680"/>
+            <a:ext cx="11155680" cy="2194560"/>
           </a:xfrm>
           <a:prstGeom prst="roundRect">
             <a:avLst>
-              <a:gd name="adj" fmla="val 6316"/>
+              <a:gd name="adj" fmla="val 5000"/>
             </a:avLst>
           </a:prstGeom>
           <a:solidFill>
@@ -3386,14 +3957,14 @@
       </p:sp>
       <p:sp>
         <p:nvSpPr>
-          <p:cNvPr id="8" name="Text 6"/>
-          <p:cNvSpPr txBox="1"/>
-          <p:nvPr/>
-        </p:nvSpPr>
-        <p:spPr>
-          <a:xfrm>
-            <a:off x="822960" y="2011680"/>
-            <a:ext cx="4754880" cy="365760"/>
+          <p:cNvPr id="9" name="Text 7"/>
+          <p:cNvSpPr txBox="1"/>
+          <p:nvPr/>
+        </p:nvSpPr>
+        <p:spPr>
+          <a:xfrm>
+            <a:off x="1005840" y="2331720"/>
+            <a:ext cx="10149840" cy="1554480"/>
           </a:xfrm>
           <a:prstGeom prst="rect">
             <a:avLst/>
@@ -3406,52 +3977,52 @@
           <a:lstStyle/>
           <a:p>
             <a:pPr indent="0" marL="0">
-              <a:buNone/>
-            </a:pPr>
-            <a:r>
-              <a:rPr lang="en-US" sz="1600" b="1" dirty="0">
-                <a:solidFill>
-                  <a:srgbClr val="2D63FF"/>
+              <a:lnSpc>
+                <a:spcPct val="130000"/>
+              </a:lnSpc>
+              <a:buNone/>
+            </a:pPr>
+            <a:r>
+              <a:rPr lang="en-US" sz="2200" dirty="0">
+                <a:solidFill>
+                  <a:srgbClr val="101828"/>
                 </a:solidFill>
                 <a:latin typeface="IBM Plex Sans" pitchFamily="34" charset="0"/>
                 <a:ea typeface="IBM Plex Sans" pitchFamily="34" charset="-122"/>
                 <a:cs typeface="IBM Plex Sans" pitchFamily="34" charset="-120"/>
               </a:rPr>
-              <a:t>It's not always an attack</a:t>
-            </a:r>
-            <a:endParaRPr lang="en-US" sz="1600" dirty="0"/>
-          </a:p>
-        </p:txBody>
-      </p:sp>
-      <p:sp>
-        <p:nvSpPr>
-          <p:cNvPr id="9" name="Text 7"/>
-          <p:cNvSpPr txBox="1"/>
-          <p:nvPr/>
-        </p:nvSpPr>
-        <p:spPr>
-          <a:xfrm>
-            <a:off x="822960" y="2395728"/>
-            <a:ext cx="4754880" cy="1005840"/>
-          </a:xfrm>
-          <a:prstGeom prst="rect">
-            <a:avLst/>
-          </a:prstGeom>
-          <a:noFill/>
-          <a:ln/>
-        </p:spPr>
-        <p:txBody>
-          <a:bodyPr wrap="square" lIns="0" tIns="0" rIns="0" bIns="0" rtlCol="0" anchor="t"/>
+              <a:t>Put the stages of a DDoS attack in the right order, from the attacker's first move to the website going offline.</a:t>
+            </a:r>
+            <a:endParaRPr lang="en-US" sz="2200" dirty="0"/>
+          </a:p>
+        </p:txBody>
+      </p:sp>
+      <p:sp>
+        <p:nvSpPr>
+          <p:cNvPr id="10" name="Text 8"/>
+          <p:cNvSpPr txBox="1"/>
+          <p:nvPr/>
+        </p:nvSpPr>
+        <p:spPr>
+          <a:xfrm>
+            <a:off x="502920" y="4526280"/>
+            <a:ext cx="11155680" cy="457200"/>
+          </a:xfrm>
+          <a:prstGeom prst="rect">
+            <a:avLst/>
+          </a:prstGeom>
+          <a:noFill/>
+          <a:ln/>
+        </p:spPr>
+        <p:txBody>
+          <a:bodyPr wrap="square" lIns="0" tIns="0" rIns="0" bIns="0" rtlCol="0" anchor="ctr"/>
           <a:lstStyle/>
           <a:p>
             <a:pPr indent="0" marL="0">
-              <a:lnSpc>
-                <a:spcPct val="120000"/>
-              </a:lnSpc>
-              <a:buNone/>
-            </a:pPr>
-            <a:r>
-              <a:rPr lang="en-US" sz="1300" dirty="0">
+              <a:buNone/>
+            </a:pPr>
+            <a:r>
+              <a:rPr lang="en-US" sz="1600" dirty="0">
                 <a:solidFill>
                   <a:srgbClr val="667085"/>
                 </a:solidFill>
@@ -3459,333 +4030,9 @@
                 <a:ea typeface="IBM Plex Sans" pitchFamily="34" charset="-122"/>
                 <a:cs typeface="IBM Plex Sans" pitchFamily="34" charset="-120"/>
               </a:rPr>
-              <a:t>A sudden rush of genuine visitors, such as tickets going on sale, can knock a site over too. That's sometimes called the 'hug of death'.</a:t>
-            </a:r>
-            <a:endParaRPr lang="en-US" sz="1300" dirty="0"/>
-          </a:p>
-        </p:txBody>
-      </p:sp>
-      <p:sp>
-        <p:nvSpPr>
-          <p:cNvPr id="10" name="Shape 8"/>
-          <p:cNvSpPr/>
-          <p:nvPr/>
-        </p:nvSpPr>
-        <p:spPr>
-          <a:xfrm>
-            <a:off x="6217920" y="1828800"/>
-            <a:ext cx="5394960" cy="1737360"/>
-          </a:xfrm>
-          <a:prstGeom prst="roundRect">
-            <a:avLst>
-              <a:gd name="adj" fmla="val 6316"/>
-            </a:avLst>
-          </a:prstGeom>
-          <a:solidFill>
-            <a:srgbClr val="FFFFFF"/>
-          </a:solidFill>
-          <a:ln w="15875">
-            <a:solidFill>
-              <a:srgbClr val="08A6A6"/>
-            </a:solidFill>
-            <a:prstDash val="solid"/>
-          </a:ln>
-        </p:spPr>
-      </p:sp>
-      <p:sp>
-        <p:nvSpPr>
-          <p:cNvPr id="11" name="Text 9"/>
-          <p:cNvSpPr txBox="1"/>
-          <p:nvPr/>
-        </p:nvSpPr>
-        <p:spPr>
-          <a:xfrm>
-            <a:off x="6537960" y="2011680"/>
-            <a:ext cx="4754880" cy="365760"/>
-          </a:xfrm>
-          <a:prstGeom prst="rect">
-            <a:avLst/>
-          </a:prstGeom>
-          <a:noFill/>
-          <a:ln/>
-        </p:spPr>
-        <p:txBody>
-          <a:bodyPr wrap="square" lIns="0" tIns="0" rIns="0" bIns="0" rtlCol="0" anchor="ctr"/>
-          <a:lstStyle/>
-          <a:p>
-            <a:pPr indent="0" marL="0">
-              <a:buNone/>
-            </a:pPr>
-            <a:r>
-              <a:rPr lang="en-US" sz="1600" b="1" dirty="0">
-                <a:solidFill>
-                  <a:srgbClr val="08A6A6"/>
-                </a:solidFill>
-                <a:latin typeface="IBM Plex Sans" pitchFamily="34" charset="0"/>
-                <a:ea typeface="IBM Plex Sans" pitchFamily="34" charset="-122"/>
-                <a:cs typeface="IBM Plex Sans" pitchFamily="34" charset="-120"/>
-              </a:rPr>
-              <a:t>Mirai's source code</a:t>
+              <a:t>Predict on paper first, then look down and test it.</a:t>
             </a:r>
             <a:endParaRPr lang="en-US" sz="1600" dirty="0"/>
-          </a:p>
-        </p:txBody>
-      </p:sp>
-      <p:sp>
-        <p:nvSpPr>
-          <p:cNvPr id="12" name="Text 10"/>
-          <p:cNvSpPr txBox="1"/>
-          <p:nvPr/>
-        </p:nvSpPr>
-        <p:spPr>
-          <a:xfrm>
-            <a:off x="6537960" y="2395728"/>
-            <a:ext cx="4754880" cy="1005840"/>
-          </a:xfrm>
-          <a:prstGeom prst="rect">
-            <a:avLst/>
-          </a:prstGeom>
-          <a:noFill/>
-          <a:ln/>
-        </p:spPr>
-        <p:txBody>
-          <a:bodyPr wrap="square" lIns="0" tIns="0" rIns="0" bIns="0" rtlCol="0" anchor="t"/>
-          <a:lstStyle/>
-          <a:p>
-            <a:pPr indent="0" marL="0">
-              <a:lnSpc>
-                <a:spcPct val="120000"/>
-              </a:lnSpc>
-              <a:buNone/>
-            </a:pPr>
-            <a:r>
-              <a:rPr lang="en-US" sz="1300" dirty="0">
-                <a:solidFill>
-                  <a:srgbClr val="667085"/>
-                </a:solidFill>
-                <a:latin typeface="IBM Plex Sans" pitchFamily="34" charset="0"/>
-                <a:ea typeface="IBM Plex Sans" pitchFamily="34" charset="-122"/>
-                <a:cs typeface="IBM Plex Sans" pitchFamily="34" charset="-120"/>
-              </a:rPr>
-              <a:t>The code behind the Mirai botnet was published online, so copies of it are still scanning the internet for weak devices today.</a:t>
-            </a:r>
-            <a:endParaRPr lang="en-US" sz="1300" dirty="0"/>
-          </a:p>
-        </p:txBody>
-      </p:sp>
-      <p:sp>
-        <p:nvSpPr>
-          <p:cNvPr id="13" name="Shape 11"/>
-          <p:cNvSpPr/>
-          <p:nvPr/>
-        </p:nvSpPr>
-        <p:spPr>
-          <a:xfrm>
-            <a:off x="502920" y="3794760"/>
-            <a:ext cx="5394960" cy="1737360"/>
-          </a:xfrm>
-          <a:prstGeom prst="roundRect">
-            <a:avLst>
-              <a:gd name="adj" fmla="val 6316"/>
-            </a:avLst>
-          </a:prstGeom>
-          <a:solidFill>
-            <a:srgbClr val="FFFFFF"/>
-          </a:solidFill>
-          <a:ln w="15875">
-            <a:solidFill>
-              <a:srgbClr val="2D63FF"/>
-            </a:solidFill>
-            <a:prstDash val="solid"/>
-          </a:ln>
-        </p:spPr>
-      </p:sp>
-      <p:sp>
-        <p:nvSpPr>
-          <p:cNvPr id="14" name="Text 12"/>
-          <p:cNvSpPr txBox="1"/>
-          <p:nvPr/>
-        </p:nvSpPr>
-        <p:spPr>
-          <a:xfrm>
-            <a:off x="822960" y="3977640"/>
-            <a:ext cx="4754880" cy="365760"/>
-          </a:xfrm>
-          <a:prstGeom prst="rect">
-            <a:avLst/>
-          </a:prstGeom>
-          <a:noFill/>
-          <a:ln/>
-        </p:spPr>
-        <p:txBody>
-          <a:bodyPr wrap="square" lIns="0" tIns="0" rIns="0" bIns="0" rtlCol="0" anchor="ctr"/>
-          <a:lstStyle/>
-          <a:p>
-            <a:pPr indent="0" marL="0">
-              <a:buNone/>
-            </a:pPr>
-            <a:r>
-              <a:rPr lang="en-US" sz="1600" b="1" dirty="0">
-                <a:solidFill>
-                  <a:srgbClr val="2D63FF"/>
-                </a:solidFill>
-                <a:latin typeface="IBM Plex Sans" pitchFamily="34" charset="0"/>
-                <a:ea typeface="IBM Plex Sans" pitchFamily="34" charset="-122"/>
-                <a:cs typeface="IBM Plex Sans" pitchFamily="34" charset="-120"/>
-              </a:rPr>
-              <a:t>Attack sizes</a:t>
-            </a:r>
-            <a:endParaRPr lang="en-US" sz="1600" dirty="0"/>
-          </a:p>
-        </p:txBody>
-      </p:sp>
-      <p:sp>
-        <p:nvSpPr>
-          <p:cNvPr id="15" name="Text 13"/>
-          <p:cNvSpPr txBox="1"/>
-          <p:nvPr/>
-        </p:nvSpPr>
-        <p:spPr>
-          <a:xfrm>
-            <a:off x="822960" y="4361688"/>
-            <a:ext cx="4754880" cy="1005840"/>
-          </a:xfrm>
-          <a:prstGeom prst="rect">
-            <a:avLst/>
-          </a:prstGeom>
-          <a:noFill/>
-          <a:ln/>
-        </p:spPr>
-        <p:txBody>
-          <a:bodyPr wrap="square" lIns="0" tIns="0" rIns="0" bIns="0" rtlCol="0" anchor="t"/>
-          <a:lstStyle/>
-          <a:p>
-            <a:pPr indent="0" marL="0">
-              <a:lnSpc>
-                <a:spcPct val="120000"/>
-              </a:lnSpc>
-              <a:buNone/>
-            </a:pPr>
-            <a:r>
-              <a:rPr lang="en-US" sz="1300" dirty="0">
-                <a:solidFill>
-                  <a:srgbClr val="667085"/>
-                </a:solidFill>
-                <a:latin typeface="IBM Plex Sans" pitchFamily="34" charset="0"/>
-                <a:ea typeface="IBM Plex Sans" pitchFamily="34" charset="-122"/>
-                <a:cs typeface="IBM Plex Sans" pitchFamily="34" charset="-120"/>
-              </a:rPr>
-              <a:t>The largest recorded DDoS attacks have exceeded the capacity of entire countries' internet connections, measured in terabits per second.</a:t>
-            </a:r>
-            <a:endParaRPr lang="en-US" sz="1300" dirty="0"/>
-          </a:p>
-        </p:txBody>
-      </p:sp>
-      <p:sp>
-        <p:nvSpPr>
-          <p:cNvPr id="16" name="Shape 14"/>
-          <p:cNvSpPr/>
-          <p:nvPr/>
-        </p:nvSpPr>
-        <p:spPr>
-          <a:xfrm>
-            <a:off x="6217920" y="3794760"/>
-            <a:ext cx="5394960" cy="1737360"/>
-          </a:xfrm>
-          <a:prstGeom prst="roundRect">
-            <a:avLst>
-              <a:gd name="adj" fmla="val 6316"/>
-            </a:avLst>
-          </a:prstGeom>
-          <a:solidFill>
-            <a:srgbClr val="FFFFFF"/>
-          </a:solidFill>
-          <a:ln w="15875">
-            <a:solidFill>
-              <a:srgbClr val="08A6A6"/>
-            </a:solidFill>
-            <a:prstDash val="solid"/>
-          </a:ln>
-        </p:spPr>
-      </p:sp>
-      <p:sp>
-        <p:nvSpPr>
-          <p:cNvPr id="17" name="Text 15"/>
-          <p:cNvSpPr txBox="1"/>
-          <p:nvPr/>
-        </p:nvSpPr>
-        <p:spPr>
-          <a:xfrm>
-            <a:off x="6537960" y="3977640"/>
-            <a:ext cx="4754880" cy="365760"/>
-          </a:xfrm>
-          <a:prstGeom prst="rect">
-            <a:avLst/>
-          </a:prstGeom>
-          <a:noFill/>
-          <a:ln/>
-        </p:spPr>
-        <p:txBody>
-          <a:bodyPr wrap="square" lIns="0" tIns="0" rIns="0" bIns="0" rtlCol="0" anchor="ctr"/>
-          <a:lstStyle/>
-          <a:p>
-            <a:pPr indent="0" marL="0">
-              <a:buNone/>
-            </a:pPr>
-            <a:r>
-              <a:rPr lang="en-US" sz="1600" b="1" dirty="0">
-                <a:solidFill>
-                  <a:srgbClr val="08A6A6"/>
-                </a:solidFill>
-                <a:latin typeface="IBM Plex Sans" pitchFamily="34" charset="0"/>
-                <a:ea typeface="IBM Plex Sans" pitchFamily="34" charset="-122"/>
-                <a:cs typeface="IBM Plex Sans" pitchFamily="34" charset="-120"/>
-              </a:rPr>
-              <a:t>Smart devices</a:t>
-            </a:r>
-            <a:endParaRPr lang="en-US" sz="1600" dirty="0"/>
-          </a:p>
-        </p:txBody>
-      </p:sp>
-      <p:sp>
-        <p:nvSpPr>
-          <p:cNvPr id="18" name="Text 16"/>
-          <p:cNvSpPr txBox="1"/>
-          <p:nvPr/>
-        </p:nvSpPr>
-        <p:spPr>
-          <a:xfrm>
-            <a:off x="6537960" y="4361688"/>
-            <a:ext cx="4754880" cy="1005840"/>
-          </a:xfrm>
-          <a:prstGeom prst="rect">
-            <a:avLst/>
-          </a:prstGeom>
-          <a:noFill/>
-          <a:ln/>
-        </p:spPr>
-        <p:txBody>
-          <a:bodyPr wrap="square" lIns="0" tIns="0" rIns="0" bIns="0" rtlCol="0" anchor="t"/>
-          <a:lstStyle/>
-          <a:p>
-            <a:pPr indent="0" marL="0">
-              <a:lnSpc>
-                <a:spcPct val="120000"/>
-              </a:lnSpc>
-              <a:buNone/>
-            </a:pPr>
-            <a:r>
-              <a:rPr lang="en-US" sz="1300" dirty="0">
-                <a:solidFill>
-                  <a:srgbClr val="667085"/>
-                </a:solidFill>
-                <a:latin typeface="IBM Plex Sans" pitchFamily="34" charset="0"/>
-                <a:ea typeface="IBM Plex Sans" pitchFamily="34" charset="-122"/>
-                <a:cs typeface="IBM Plex Sans" pitchFamily="34" charset="-120"/>
-              </a:rPr>
-              <a:t>Your fridge, doorbell or camera can join a botnet. Change default passwords and install updates on anything you connect to the internet.</a:t>
-            </a:r>
-            <a:endParaRPr lang="en-US" sz="1300" dirty="0"/>
           </a:p>
         </p:txBody>
       </p:sp>
@@ -3952,7 +4199,7 @@
                 <a:ea typeface="IBM Plex Sans" pitchFamily="34" charset="-122"/>
                 <a:cs typeface="IBM Plex Sans" pitchFamily="34" charset="-120"/>
               </a:rPr>
-              <a:t>Exam practice</a:t>
+              <a:t>Worth knowing</a:t>
             </a:r>
             <a:endParaRPr lang="en-US" sz="3200" dirty="0"/>
           </a:p>
@@ -3991,7 +4238,7 @@
                 <a:ea typeface="IBM Plex Sans" pitchFamily="34" charset="-122"/>
                 <a:cs typeface="IBM Plex Sans" pitchFamily="34" charset="-120"/>
               </a:rPr>
-              <a:t>Devices away. Answer from memory on the worksheet.</a:t>
+              <a:t>The information markers dotted around the room</a:t>
             </a:r>
             <a:endParaRPr lang="en-US" sz="1500" dirty="0"/>
           </a:p>
@@ -4006,11 +4253,11 @@
         <p:spPr>
           <a:xfrm>
             <a:off x="502920" y="1828800"/>
-            <a:ext cx="11155680" cy="1097280"/>
+            <a:ext cx="5394960" cy="1737360"/>
           </a:xfrm>
           <a:prstGeom prst="roundRect">
             <a:avLst>
-              <a:gd name="adj" fmla="val 10000"/>
+              <a:gd name="adj" fmla="val 6316"/>
             </a:avLst>
           </a:prstGeom>
           <a:solidFill>
@@ -4018,7 +4265,7 @@
           </a:solidFill>
           <a:ln w="15875">
             <a:solidFill>
-              <a:srgbClr val="D9DEE7"/>
+              <a:srgbClr val="2D63FF"/>
             </a:solidFill>
             <a:prstDash val="solid"/>
           </a:ln>
@@ -4032,8 +4279,8 @@
         </p:nvSpPr>
         <p:spPr>
           <a:xfrm>
-            <a:off x="914400" y="1938528"/>
-            <a:ext cx="9418320" cy="877824"/>
+            <a:off x="822960" y="2011680"/>
+            <a:ext cx="4754880" cy="365760"/>
           </a:xfrm>
           <a:prstGeom prst="rect">
             <a:avLst/>
@@ -4046,101 +4293,79 @@
           <a:lstStyle/>
           <a:p>
             <a:pPr indent="0" marL="0">
-              <a:lnSpc>
-                <a:spcPct val="118000"/>
-              </a:lnSpc>
-              <a:buNone/>
-            </a:pPr>
-            <a:r>
-              <a:rPr lang="en-US" sz="1700" dirty="0">
-                <a:solidFill>
-                  <a:srgbClr val="101828"/>
+              <a:buNone/>
+            </a:pPr>
+            <a:r>
+              <a:rPr lang="en-US" sz="1600" b="1" dirty="0">
+                <a:solidFill>
+                  <a:srgbClr val="2D63FF"/>
                 </a:solidFill>
                 <a:latin typeface="IBM Plex Sans" pitchFamily="34" charset="0"/>
                 <a:ea typeface="IBM Plex Sans" pitchFamily="34" charset="-122"/>
                 <a:cs typeface="IBM Plex Sans" pitchFamily="34" charset="-120"/>
               </a:rPr>
-              <a:t>Describe what a denial-of-service attack does to a service.</a:t>
-            </a:r>
-            <a:endParaRPr lang="en-US" sz="1700" dirty="0"/>
-          </a:p>
-        </p:txBody>
-      </p:sp>
-      <p:sp>
-        <p:nvSpPr>
-          <p:cNvPr id="9" name="Shape 7"/>
+              <a:t>It's not always an attack</a:t>
+            </a:r>
+            <a:endParaRPr lang="en-US" sz="1600" dirty="0"/>
+          </a:p>
+        </p:txBody>
+      </p:sp>
+      <p:sp>
+        <p:nvSpPr>
+          <p:cNvPr id="9" name="Text 7"/>
+          <p:cNvSpPr txBox="1"/>
+          <p:nvPr/>
+        </p:nvSpPr>
+        <p:spPr>
+          <a:xfrm>
+            <a:off x="822960" y="2395728"/>
+            <a:ext cx="4754880" cy="1005840"/>
+          </a:xfrm>
+          <a:prstGeom prst="rect">
+            <a:avLst/>
+          </a:prstGeom>
+          <a:noFill/>
+          <a:ln/>
+        </p:spPr>
+        <p:txBody>
+          <a:bodyPr wrap="square" lIns="0" tIns="0" rIns="0" bIns="0" rtlCol="0" anchor="t"/>
+          <a:lstStyle/>
+          <a:p>
+            <a:pPr indent="0" marL="0">
+              <a:lnSpc>
+                <a:spcPct val="120000"/>
+              </a:lnSpc>
+              <a:buNone/>
+            </a:pPr>
+            <a:r>
+              <a:rPr lang="en-US" sz="1300" dirty="0">
+                <a:solidFill>
+                  <a:srgbClr val="667085"/>
+                </a:solidFill>
+                <a:latin typeface="IBM Plex Sans" pitchFamily="34" charset="0"/>
+                <a:ea typeface="IBM Plex Sans" pitchFamily="34" charset="-122"/>
+                <a:cs typeface="IBM Plex Sans" pitchFamily="34" charset="-120"/>
+              </a:rPr>
+              <a:t>A sudden rush of genuine visitors, such as tickets going on sale, can knock a site over too. That's sometimes called the 'hug of death'.</a:t>
+            </a:r>
+            <a:endParaRPr lang="en-US" sz="1300" dirty="0"/>
+          </a:p>
+        </p:txBody>
+      </p:sp>
+      <p:sp>
+        <p:nvSpPr>
+          <p:cNvPr id="10" name="Shape 8"/>
           <p:cNvSpPr/>
           <p:nvPr/>
         </p:nvSpPr>
         <p:spPr>
           <a:xfrm>
-            <a:off x="10515600" y="2130552"/>
-            <a:ext cx="868680" cy="493776"/>
+            <a:off x="6217920" y="1828800"/>
+            <a:ext cx="5394960" cy="1737360"/>
           </a:xfrm>
           <a:prstGeom prst="roundRect">
             <a:avLst>
-              <a:gd name="adj" fmla="val 18519"/>
-            </a:avLst>
-          </a:prstGeom>
-          <a:solidFill>
-            <a:srgbClr val="EEF2FB"/>
-          </a:solidFill>
-          <a:ln/>
-        </p:spPr>
-      </p:sp>
-      <p:sp>
-        <p:nvSpPr>
-          <p:cNvPr id="10" name="Text 8"/>
-          <p:cNvSpPr txBox="1"/>
-          <p:nvPr/>
-        </p:nvSpPr>
-        <p:spPr>
-          <a:xfrm>
-            <a:off x="10515600" y="2130552"/>
-            <a:ext cx="868680" cy="493776"/>
-          </a:xfrm>
-          <a:prstGeom prst="rect">
-            <a:avLst/>
-          </a:prstGeom>
-          <a:noFill/>
-          <a:ln/>
-        </p:spPr>
-        <p:txBody>
-          <a:bodyPr wrap="square" lIns="0" tIns="0" rIns="0" bIns="0" rtlCol="0" anchor="ctr"/>
-          <a:lstStyle/>
-          <a:p>
-            <a:pPr algn="ctr" indent="0" marL="0">
-              <a:buNone/>
-            </a:pPr>
-            <a:r>
-              <a:rPr lang="en-US" sz="1500" b="1" dirty="0">
-                <a:solidFill>
-                  <a:srgbClr val="2D63FF"/>
-                </a:solidFill>
-                <a:latin typeface="IBM Plex Mono" pitchFamily="34" charset="0"/>
-                <a:ea typeface="IBM Plex Mono" pitchFamily="34" charset="-122"/>
-                <a:cs typeface="IBM Plex Mono" pitchFamily="34" charset="-120"/>
-              </a:rPr>
-              <a:t>[2]</a:t>
-            </a:r>
-            <a:endParaRPr lang="en-US" sz="1500" dirty="0"/>
-          </a:p>
-        </p:txBody>
-      </p:sp>
-      <p:sp>
-        <p:nvSpPr>
-          <p:cNvPr id="11" name="Shape 9"/>
-          <p:cNvSpPr/>
-          <p:nvPr/>
-        </p:nvSpPr>
-        <p:spPr>
-          <a:xfrm>
-            <a:off x="502920" y="3127248"/>
-            <a:ext cx="11155680" cy="1097280"/>
-          </a:xfrm>
-          <a:prstGeom prst="roundRect">
-            <a:avLst>
-              <a:gd name="adj" fmla="val 10000"/>
+              <a:gd name="adj" fmla="val 6316"/>
             </a:avLst>
           </a:prstGeom>
           <a:solidFill>
@@ -4148,7 +4373,7 @@
           </a:solidFill>
           <a:ln w="15875">
             <a:solidFill>
-              <a:srgbClr val="D9DEE7"/>
+              <a:srgbClr val="08A6A6"/>
             </a:solidFill>
             <a:prstDash val="solid"/>
           </a:ln>
@@ -4156,14 +4381,14 @@
       </p:sp>
       <p:sp>
         <p:nvSpPr>
-          <p:cNvPr id="12" name="Text 10"/>
-          <p:cNvSpPr txBox="1"/>
-          <p:nvPr/>
-        </p:nvSpPr>
-        <p:spPr>
-          <a:xfrm>
-            <a:off x="914400" y="3236976"/>
-            <a:ext cx="9418320" cy="877824"/>
+          <p:cNvPr id="11" name="Text 9"/>
+          <p:cNvSpPr txBox="1"/>
+          <p:nvPr/>
+        </p:nvSpPr>
+        <p:spPr>
+          <a:xfrm>
+            <a:off x="6537960" y="2011680"/>
+            <a:ext cx="4754880" cy="365760"/>
           </a:xfrm>
           <a:prstGeom prst="rect">
             <a:avLst/>
@@ -4176,23 +4401,62 @@
           <a:lstStyle/>
           <a:p>
             <a:pPr indent="0" marL="0">
-              <a:lnSpc>
-                <a:spcPct val="118000"/>
-              </a:lnSpc>
-              <a:buNone/>
-            </a:pPr>
-            <a:r>
-              <a:rPr lang="en-US" sz="1700" dirty="0">
-                <a:solidFill>
-                  <a:srgbClr val="101828"/>
+              <a:buNone/>
+            </a:pPr>
+            <a:r>
+              <a:rPr lang="en-US" sz="1600" b="1" dirty="0">
+                <a:solidFill>
+                  <a:srgbClr val="08A6A6"/>
                 </a:solidFill>
                 <a:latin typeface="IBM Plex Sans" pitchFamily="34" charset="0"/>
                 <a:ea typeface="IBM Plex Sans" pitchFamily="34" charset="-122"/>
                 <a:cs typeface="IBM Plex Sans" pitchFamily="34" charset="-120"/>
               </a:rPr>
-              <a:t>Explain why an attack from a botnet is harder to block than one from a single computer.</a:t>
-            </a:r>
-            <a:endParaRPr lang="en-US" sz="1700" dirty="0"/>
+              <a:t>Mirai's source code</a:t>
+            </a:r>
+            <a:endParaRPr lang="en-US" sz="1600" dirty="0"/>
+          </a:p>
+        </p:txBody>
+      </p:sp>
+      <p:sp>
+        <p:nvSpPr>
+          <p:cNvPr id="12" name="Text 10"/>
+          <p:cNvSpPr txBox="1"/>
+          <p:nvPr/>
+        </p:nvSpPr>
+        <p:spPr>
+          <a:xfrm>
+            <a:off x="6537960" y="2395728"/>
+            <a:ext cx="4754880" cy="1005840"/>
+          </a:xfrm>
+          <a:prstGeom prst="rect">
+            <a:avLst/>
+          </a:prstGeom>
+          <a:noFill/>
+          <a:ln/>
+        </p:spPr>
+        <p:txBody>
+          <a:bodyPr wrap="square" lIns="0" tIns="0" rIns="0" bIns="0" rtlCol="0" anchor="t"/>
+          <a:lstStyle/>
+          <a:p>
+            <a:pPr indent="0" marL="0">
+              <a:lnSpc>
+                <a:spcPct val="120000"/>
+              </a:lnSpc>
+              <a:buNone/>
+            </a:pPr>
+            <a:r>
+              <a:rPr lang="en-US" sz="1300" dirty="0">
+                <a:solidFill>
+                  <a:srgbClr val="667085"/>
+                </a:solidFill>
+                <a:latin typeface="IBM Plex Sans" pitchFamily="34" charset="0"/>
+                <a:ea typeface="IBM Plex Sans" pitchFamily="34" charset="-122"/>
+                <a:cs typeface="IBM Plex Sans" pitchFamily="34" charset="-120"/>
+              </a:rPr>
+              <a:t>The code behind the Mirai botnet was published online, so copies of it are still scanning the internet for weak devices today.</a:t>
+            </a:r>
+            <a:endParaRPr lang="en-US" sz="1300" dirty="0"/>
           </a:p>
         </p:txBody>
       </p:sp>
@@ -4204,73 +4468,12 @@
         </p:nvSpPr>
         <p:spPr>
           <a:xfrm>
-            <a:off x="10515600" y="3429000"/>
-            <a:ext cx="868680" cy="493776"/>
+            <a:off x="502920" y="3794760"/>
+            <a:ext cx="5394960" cy="1737360"/>
           </a:xfrm>
           <a:prstGeom prst="roundRect">
             <a:avLst>
-              <a:gd name="adj" fmla="val 18519"/>
-            </a:avLst>
-          </a:prstGeom>
-          <a:solidFill>
-            <a:srgbClr val="EEF2FB"/>
-          </a:solidFill>
-          <a:ln/>
-        </p:spPr>
-      </p:sp>
-      <p:sp>
-        <p:nvSpPr>
-          <p:cNvPr id="14" name="Text 12"/>
-          <p:cNvSpPr txBox="1"/>
-          <p:nvPr/>
-        </p:nvSpPr>
-        <p:spPr>
-          <a:xfrm>
-            <a:off x="10515600" y="3429000"/>
-            <a:ext cx="868680" cy="493776"/>
-          </a:xfrm>
-          <a:prstGeom prst="rect">
-            <a:avLst/>
-          </a:prstGeom>
-          <a:noFill/>
-          <a:ln/>
-        </p:spPr>
-        <p:txBody>
-          <a:bodyPr wrap="square" lIns="0" tIns="0" rIns="0" bIns="0" rtlCol="0" anchor="ctr"/>
-          <a:lstStyle/>
-          <a:p>
-            <a:pPr algn="ctr" indent="0" marL="0">
-              <a:buNone/>
-            </a:pPr>
-            <a:r>
-              <a:rPr lang="en-US" sz="1500" b="1" dirty="0">
-                <a:solidFill>
-                  <a:srgbClr val="2D63FF"/>
-                </a:solidFill>
-                <a:latin typeface="IBM Plex Mono" pitchFamily="34" charset="0"/>
-                <a:ea typeface="IBM Plex Mono" pitchFamily="34" charset="-122"/>
-                <a:cs typeface="IBM Plex Mono" pitchFamily="34" charset="-120"/>
-              </a:rPr>
-              <a:t>[3]</a:t>
-            </a:r>
-            <a:endParaRPr lang="en-US" sz="1500" dirty="0"/>
-          </a:p>
-        </p:txBody>
-      </p:sp>
-      <p:sp>
-        <p:nvSpPr>
-          <p:cNvPr id="15" name="Shape 13"/>
-          <p:cNvSpPr/>
-          <p:nvPr/>
-        </p:nvSpPr>
-        <p:spPr>
-          <a:xfrm>
-            <a:off x="502920" y="4425696"/>
-            <a:ext cx="11155680" cy="1097280"/>
-          </a:xfrm>
-          <a:prstGeom prst="roundRect">
-            <a:avLst>
-              <a:gd name="adj" fmla="val 10000"/>
+              <a:gd name="adj" fmla="val 6316"/>
             </a:avLst>
           </a:prstGeom>
           <a:solidFill>
@@ -4278,7 +4481,7 @@
           </a:solidFill>
           <a:ln w="15875">
             <a:solidFill>
-              <a:srgbClr val="D9DEE7"/>
+              <a:srgbClr val="2D63FF"/>
             </a:solidFill>
             <a:prstDash val="solid"/>
           </a:ln>
@@ -4286,14 +4489,14 @@
       </p:sp>
       <p:sp>
         <p:nvSpPr>
-          <p:cNvPr id="16" name="Text 14"/>
-          <p:cNvSpPr txBox="1"/>
-          <p:nvPr/>
-        </p:nvSpPr>
-        <p:spPr>
-          <a:xfrm>
-            <a:off x="914400" y="4535424"/>
-            <a:ext cx="9418320" cy="877824"/>
+          <p:cNvPr id="14" name="Text 12"/>
+          <p:cNvSpPr txBox="1"/>
+          <p:nvPr/>
+        </p:nvSpPr>
+        <p:spPr>
+          <a:xfrm>
+            <a:off x="822960" y="3977640"/>
+            <a:ext cx="4754880" cy="365760"/>
           </a:xfrm>
           <a:prstGeom prst="rect">
             <a:avLst/>
@@ -4306,47 +4509,130 @@
           <a:lstStyle/>
           <a:p>
             <a:pPr indent="0" marL="0">
-              <a:lnSpc>
-                <a:spcPct val="118000"/>
-              </a:lnSpc>
-              <a:buNone/>
-            </a:pPr>
-            <a:r>
-              <a:rPr lang="en-US" sz="1700" dirty="0">
-                <a:solidFill>
-                  <a:srgbClr val="101828"/>
+              <a:buNone/>
+            </a:pPr>
+            <a:r>
+              <a:rPr lang="en-US" sz="1600" b="1" dirty="0">
+                <a:solidFill>
+                  <a:srgbClr val="2D63FF"/>
                 </a:solidFill>
                 <a:latin typeface="IBM Plex Sans" pitchFamily="34" charset="0"/>
                 <a:ea typeface="IBM Plex Sans" pitchFamily="34" charset="-122"/>
                 <a:cs typeface="IBM Plex Sans" pitchFamily="34" charset="-120"/>
               </a:rPr>
-              <a:t>Describe two measures that reduce the impact of a DDoS attack on a website.</a:t>
-            </a:r>
-            <a:endParaRPr lang="en-US" sz="1700" dirty="0"/>
-          </a:p>
-        </p:txBody>
-      </p:sp>
-      <p:sp>
-        <p:nvSpPr>
-          <p:cNvPr id="17" name="Shape 15"/>
+              <a:t>Attack sizes</a:t>
+            </a:r>
+            <a:endParaRPr lang="en-US" sz="1600" dirty="0"/>
+          </a:p>
+        </p:txBody>
+      </p:sp>
+      <p:sp>
+        <p:nvSpPr>
+          <p:cNvPr id="15" name="Text 13"/>
+          <p:cNvSpPr txBox="1"/>
+          <p:nvPr/>
+        </p:nvSpPr>
+        <p:spPr>
+          <a:xfrm>
+            <a:off x="822960" y="4361688"/>
+            <a:ext cx="4754880" cy="1005840"/>
+          </a:xfrm>
+          <a:prstGeom prst="rect">
+            <a:avLst/>
+          </a:prstGeom>
+          <a:noFill/>
+          <a:ln/>
+        </p:spPr>
+        <p:txBody>
+          <a:bodyPr wrap="square" lIns="0" tIns="0" rIns="0" bIns="0" rtlCol="0" anchor="t"/>
+          <a:lstStyle/>
+          <a:p>
+            <a:pPr indent="0" marL="0">
+              <a:lnSpc>
+                <a:spcPct val="120000"/>
+              </a:lnSpc>
+              <a:buNone/>
+            </a:pPr>
+            <a:r>
+              <a:rPr lang="en-US" sz="1300" dirty="0">
+                <a:solidFill>
+                  <a:srgbClr val="667085"/>
+                </a:solidFill>
+                <a:latin typeface="IBM Plex Sans" pitchFamily="34" charset="0"/>
+                <a:ea typeface="IBM Plex Sans" pitchFamily="34" charset="-122"/>
+                <a:cs typeface="IBM Plex Sans" pitchFamily="34" charset="-120"/>
+              </a:rPr>
+              <a:t>The largest recorded DDoS attacks have exceeded the capacity of entire countries' internet connections, measured in terabits per second.</a:t>
+            </a:r>
+            <a:endParaRPr lang="en-US" sz="1300" dirty="0"/>
+          </a:p>
+        </p:txBody>
+      </p:sp>
+      <p:sp>
+        <p:nvSpPr>
+          <p:cNvPr id="16" name="Shape 14"/>
           <p:cNvSpPr/>
           <p:nvPr/>
         </p:nvSpPr>
         <p:spPr>
           <a:xfrm>
-            <a:off x="10515600" y="4727448"/>
-            <a:ext cx="868680" cy="493776"/>
+            <a:off x="6217920" y="3794760"/>
+            <a:ext cx="5394960" cy="1737360"/>
           </a:xfrm>
           <a:prstGeom prst="roundRect">
             <a:avLst>
-              <a:gd name="adj" fmla="val 18519"/>
+              <a:gd name="adj" fmla="val 6316"/>
             </a:avLst>
           </a:prstGeom>
           <a:solidFill>
-            <a:srgbClr val="EEF2FB"/>
+            <a:srgbClr val="FFFFFF"/>
           </a:solidFill>
-          <a:ln/>
-        </p:spPr>
+          <a:ln w="15875">
+            <a:solidFill>
+              <a:srgbClr val="08A6A6"/>
+            </a:solidFill>
+            <a:prstDash val="solid"/>
+          </a:ln>
+        </p:spPr>
+      </p:sp>
+      <p:sp>
+        <p:nvSpPr>
+          <p:cNvPr id="17" name="Text 15"/>
+          <p:cNvSpPr txBox="1"/>
+          <p:nvPr/>
+        </p:nvSpPr>
+        <p:spPr>
+          <a:xfrm>
+            <a:off x="6537960" y="3977640"/>
+            <a:ext cx="4754880" cy="365760"/>
+          </a:xfrm>
+          <a:prstGeom prst="rect">
+            <a:avLst/>
+          </a:prstGeom>
+          <a:noFill/>
+          <a:ln/>
+        </p:spPr>
+        <p:txBody>
+          <a:bodyPr wrap="square" lIns="0" tIns="0" rIns="0" bIns="0" rtlCol="0" anchor="ctr"/>
+          <a:lstStyle/>
+          <a:p>
+            <a:pPr indent="0" marL="0">
+              <a:buNone/>
+            </a:pPr>
+            <a:r>
+              <a:rPr lang="en-US" sz="1600" b="1" dirty="0">
+                <a:solidFill>
+                  <a:srgbClr val="08A6A6"/>
+                </a:solidFill>
+                <a:latin typeface="IBM Plex Sans" pitchFamily="34" charset="0"/>
+                <a:ea typeface="IBM Plex Sans" pitchFamily="34" charset="-122"/>
+                <a:cs typeface="IBM Plex Sans" pitchFamily="34" charset="-120"/>
+              </a:rPr>
+              <a:t>Smart devices</a:t>
+            </a:r>
+            <a:endParaRPr lang="en-US" sz="1600" dirty="0"/>
+          </a:p>
+        </p:txBody>
       </p:sp>
       <p:sp>
         <p:nvSpPr>
@@ -4356,34 +4642,37 @@
         </p:nvSpPr>
         <p:spPr>
           <a:xfrm>
-            <a:off x="10515600" y="4727448"/>
-            <a:ext cx="868680" cy="493776"/>
-          </a:xfrm>
-          <a:prstGeom prst="rect">
-            <a:avLst/>
-          </a:prstGeom>
-          <a:noFill/>
-          <a:ln/>
-        </p:spPr>
-        <p:txBody>
-          <a:bodyPr wrap="square" lIns="0" tIns="0" rIns="0" bIns="0" rtlCol="0" anchor="ctr"/>
-          <a:lstStyle/>
-          <a:p>
-            <a:pPr algn="ctr" indent="0" marL="0">
-              <a:buNone/>
-            </a:pPr>
-            <a:r>
-              <a:rPr lang="en-US" sz="1500" b="1" dirty="0">
-                <a:solidFill>
-                  <a:srgbClr val="2D63FF"/>
-                </a:solidFill>
-                <a:latin typeface="IBM Plex Mono" pitchFamily="34" charset="0"/>
-                <a:ea typeface="IBM Plex Mono" pitchFamily="34" charset="-122"/>
-                <a:cs typeface="IBM Plex Mono" pitchFamily="34" charset="-120"/>
-              </a:rPr>
-              <a:t>[4]</a:t>
-            </a:r>
-            <a:endParaRPr lang="en-US" sz="1500" dirty="0"/>
+            <a:off x="6537960" y="4361688"/>
+            <a:ext cx="4754880" cy="1005840"/>
+          </a:xfrm>
+          <a:prstGeom prst="rect">
+            <a:avLst/>
+          </a:prstGeom>
+          <a:noFill/>
+          <a:ln/>
+        </p:spPr>
+        <p:txBody>
+          <a:bodyPr wrap="square" lIns="0" tIns="0" rIns="0" bIns="0" rtlCol="0" anchor="t"/>
+          <a:lstStyle/>
+          <a:p>
+            <a:pPr indent="0" marL="0">
+              <a:lnSpc>
+                <a:spcPct val="120000"/>
+              </a:lnSpc>
+              <a:buNone/>
+            </a:pPr>
+            <a:r>
+              <a:rPr lang="en-US" sz="1300" dirty="0">
+                <a:solidFill>
+                  <a:srgbClr val="667085"/>
+                </a:solidFill>
+                <a:latin typeface="IBM Plex Sans" pitchFamily="34" charset="0"/>
+                <a:ea typeface="IBM Plex Sans" pitchFamily="34" charset="-122"/>
+                <a:cs typeface="IBM Plex Sans" pitchFamily="34" charset="-120"/>
+              </a:rPr>
+              <a:t>Your fridge, doorbell or camera can join a botnet. Change default passwords and install updates on anything you connect to the internet.</a:t>
+            </a:r>
+            <a:endParaRPr lang="en-US" sz="1300" dirty="0"/>
           </a:p>
         </p:txBody>
       </p:sp>
@@ -4398,6 +4687,604 @@
 <file path=ppt/slides/slide14.xml><?xml version="1.0" encoding="utf-8"?>
 <p:sld xmlns:a="http://schemas.openxmlformats.org/drawingml/2006/main" xmlns:r="http://schemas.openxmlformats.org/officeDocument/2006/relationships" xmlns:p="http://schemas.openxmlformats.org/presentationml/2006/main">
   <p:cSld name="Slide 14">
+    <p:bg>
+      <p:bgPr>
+        <a:solidFill>
+          <a:srgbClr val="F7F7F4"/>
+        </a:solidFill>
+      </p:bgPr>
+    </p:bg>
+    <p:spTree>
+      <p:nvGrpSpPr>
+        <p:cNvPr id="1" name=""/>
+        <p:cNvGrpSpPr/>
+        <p:nvPr/>
+      </p:nvGrpSpPr>
+      <p:grpSpPr>
+        <a:xfrm>
+          <a:off x="0" y="0"/>
+          <a:ext cx="0" cy="0"/>
+          <a:chOff x="0" y="0"/>
+          <a:chExt cx="0" cy="0"/>
+        </a:xfrm>
+      </p:grpSpPr>
+      <p:sp>
+        <p:nvSpPr>
+          <p:cNvPr id="2" name="Shape 0"/>
+          <p:cNvSpPr/>
+          <p:nvPr/>
+        </p:nvSpPr>
+        <p:spPr>
+          <a:xfrm>
+            <a:off x="0" y="0"/>
+            <a:ext cx="12188952" cy="82296"/>
+          </a:xfrm>
+          <a:prstGeom prst="rect">
+            <a:avLst/>
+          </a:prstGeom>
+          <a:solidFill>
+            <a:srgbClr val="2D63FF"/>
+          </a:solidFill>
+          <a:ln/>
+        </p:spPr>
+      </p:sp>
+      <p:sp>
+        <p:nvSpPr>
+          <p:cNvPr id="3" name="Text 1"/>
+          <p:cNvSpPr txBox="1"/>
+          <p:nvPr/>
+        </p:nvSpPr>
+        <p:spPr>
+          <a:xfrm>
+            <a:off x="502920" y="6236208"/>
+            <a:ext cx="7772400" cy="365760"/>
+          </a:xfrm>
+          <a:prstGeom prst="rect">
+            <a:avLst/>
+          </a:prstGeom>
+          <a:noFill/>
+          <a:ln/>
+        </p:spPr>
+        <p:txBody>
+          <a:bodyPr wrap="square" lIns="0" tIns="0" rIns="0" bIns="0" rtlCol="0" anchor="ctr"/>
+          <a:lstStyle/>
+          <a:p>
+            <a:pPr indent="0" marL="0">
+              <a:buNone/>
+            </a:pPr>
+            <a:r>
+              <a:rPr lang="en-US" sz="1100" dirty="0">
+                <a:solidFill>
+                  <a:srgbClr val="667085"/>
+                </a:solidFill>
+                <a:latin typeface="IBM Plex Mono" pitchFamily="34" charset="0"/>
+                <a:ea typeface="IBM Plex Mono" pitchFamily="34" charset="-122"/>
+                <a:cs typeface="IBM Plex Mono" pitchFamily="34" charset="-120"/>
+              </a:rPr>
+              <a:t>1.4 Network security  |  Lesson 7</a:t>
+            </a:r>
+            <a:endParaRPr lang="en-US" sz="1100" dirty="0"/>
+          </a:p>
+        </p:txBody>
+      </p:sp>
+      <p:sp>
+        <p:nvSpPr>
+          <p:cNvPr id="4" name="Text 2"/>
+          <p:cNvSpPr txBox="1"/>
+          <p:nvPr/>
+        </p:nvSpPr>
+        <p:spPr>
+          <a:xfrm>
+            <a:off x="9326880" y="6236208"/>
+            <a:ext cx="2377440" cy="365760"/>
+          </a:xfrm>
+          <a:prstGeom prst="rect">
+            <a:avLst/>
+          </a:prstGeom>
+          <a:noFill/>
+          <a:ln/>
+        </p:spPr>
+        <p:txBody>
+          <a:bodyPr wrap="square" lIns="0" tIns="0" rIns="0" bIns="0" rtlCol="0" anchor="ctr"/>
+          <a:lstStyle/>
+          <a:p>
+            <a:pPr algn="r" indent="0" marL="0">
+              <a:buNone/>
+            </a:pPr>
+            <a:r>
+              <a:rPr lang="en-US" sz="1100" dirty="0">
+                <a:solidFill>
+                  <a:srgbClr val="667085"/>
+                </a:solidFill>
+                <a:latin typeface="IBM Plex Mono" pitchFamily="34" charset="0"/>
+                <a:ea typeface="IBM Plex Mono" pitchFamily="34" charset="-122"/>
+                <a:cs typeface="IBM Plex Mono" pitchFamily="34" charset="-120"/>
+              </a:rPr>
+              <a:t>Revise 360</a:t>
+            </a:r>
+            <a:endParaRPr lang="en-US" sz="1100" dirty="0"/>
+          </a:p>
+        </p:txBody>
+      </p:sp>
+      <p:sp>
+        <p:nvSpPr>
+          <p:cNvPr id="5" name="Text 3"/>
+          <p:cNvSpPr txBox="1"/>
+          <p:nvPr/>
+        </p:nvSpPr>
+        <p:spPr>
+          <a:xfrm>
+            <a:off x="502920" y="411480"/>
+            <a:ext cx="11155680" cy="777240"/>
+          </a:xfrm>
+          <a:prstGeom prst="rect">
+            <a:avLst/>
+          </a:prstGeom>
+          <a:noFill/>
+          <a:ln/>
+        </p:spPr>
+        <p:txBody>
+          <a:bodyPr wrap="square" lIns="0" tIns="0" rIns="0" bIns="0" rtlCol="0" anchor="ctr"/>
+          <a:lstStyle/>
+          <a:p>
+            <a:pPr indent="0" marL="0">
+              <a:buNone/>
+            </a:pPr>
+            <a:r>
+              <a:rPr lang="en-US" sz="3200" b="1" dirty="0">
+                <a:solidFill>
+                  <a:srgbClr val="101828"/>
+                </a:solidFill>
+                <a:latin typeface="IBM Plex Sans" pitchFamily="34" charset="0"/>
+                <a:ea typeface="IBM Plex Sans" pitchFamily="34" charset="-122"/>
+                <a:cs typeface="IBM Plex Sans" pitchFamily="34" charset="-120"/>
+              </a:rPr>
+              <a:t>Exam practice</a:t>
+            </a:r>
+            <a:endParaRPr lang="en-US" sz="3200" dirty="0"/>
+          </a:p>
+        </p:txBody>
+      </p:sp>
+      <p:sp>
+        <p:nvSpPr>
+          <p:cNvPr id="6" name="Text 4"/>
+          <p:cNvSpPr txBox="1"/>
+          <p:nvPr/>
+        </p:nvSpPr>
+        <p:spPr>
+          <a:xfrm>
+            <a:off x="502920" y="1170432"/>
+            <a:ext cx="11155680" cy="411480"/>
+          </a:xfrm>
+          <a:prstGeom prst="rect">
+            <a:avLst/>
+          </a:prstGeom>
+          <a:noFill/>
+          <a:ln/>
+        </p:spPr>
+        <p:txBody>
+          <a:bodyPr wrap="square" lIns="0" tIns="0" rIns="0" bIns="0" rtlCol="0" anchor="ctr"/>
+          <a:lstStyle/>
+          <a:p>
+            <a:pPr indent="0" marL="0">
+              <a:buNone/>
+            </a:pPr>
+            <a:r>
+              <a:rPr lang="en-US" sz="1500" dirty="0">
+                <a:solidFill>
+                  <a:srgbClr val="667085"/>
+                </a:solidFill>
+                <a:latin typeface="IBM Plex Sans" pitchFamily="34" charset="0"/>
+                <a:ea typeface="IBM Plex Sans" pitchFamily="34" charset="-122"/>
+                <a:cs typeface="IBM Plex Sans" pitchFamily="34" charset="-120"/>
+              </a:rPr>
+              <a:t>Devices away. Answer from memory on the worksheet.</a:t>
+            </a:r>
+            <a:endParaRPr lang="en-US" sz="1500" dirty="0"/>
+          </a:p>
+        </p:txBody>
+      </p:sp>
+      <p:sp>
+        <p:nvSpPr>
+          <p:cNvPr id="7" name="Shape 5"/>
+          <p:cNvSpPr/>
+          <p:nvPr/>
+        </p:nvSpPr>
+        <p:spPr>
+          <a:xfrm>
+            <a:off x="502920" y="1828800"/>
+            <a:ext cx="11155680" cy="1097280"/>
+          </a:xfrm>
+          <a:prstGeom prst="roundRect">
+            <a:avLst>
+              <a:gd name="adj" fmla="val 10000"/>
+            </a:avLst>
+          </a:prstGeom>
+          <a:solidFill>
+            <a:srgbClr val="FFFFFF"/>
+          </a:solidFill>
+          <a:ln w="15875">
+            <a:solidFill>
+              <a:srgbClr val="D9DEE7"/>
+            </a:solidFill>
+            <a:prstDash val="solid"/>
+          </a:ln>
+        </p:spPr>
+      </p:sp>
+      <p:sp>
+        <p:nvSpPr>
+          <p:cNvPr id="8" name="Text 6"/>
+          <p:cNvSpPr txBox="1"/>
+          <p:nvPr/>
+        </p:nvSpPr>
+        <p:spPr>
+          <a:xfrm>
+            <a:off x="914400" y="1938528"/>
+            <a:ext cx="9418320" cy="877824"/>
+          </a:xfrm>
+          <a:prstGeom prst="rect">
+            <a:avLst/>
+          </a:prstGeom>
+          <a:noFill/>
+          <a:ln/>
+        </p:spPr>
+        <p:txBody>
+          <a:bodyPr wrap="square" lIns="0" tIns="0" rIns="0" bIns="0" rtlCol="0" anchor="ctr"/>
+          <a:lstStyle/>
+          <a:p>
+            <a:pPr indent="0" marL="0">
+              <a:lnSpc>
+                <a:spcPct val="118000"/>
+              </a:lnSpc>
+              <a:buNone/>
+            </a:pPr>
+            <a:r>
+              <a:rPr lang="en-US" sz="1700" dirty="0">
+                <a:solidFill>
+                  <a:srgbClr val="101828"/>
+                </a:solidFill>
+                <a:latin typeface="IBM Plex Sans" pitchFamily="34" charset="0"/>
+                <a:ea typeface="IBM Plex Sans" pitchFamily="34" charset="-122"/>
+                <a:cs typeface="IBM Plex Sans" pitchFamily="34" charset="-120"/>
+              </a:rPr>
+              <a:t>Describe what a denial-of-service attack does to a service.</a:t>
+            </a:r>
+            <a:endParaRPr lang="en-US" sz="1700" dirty="0"/>
+          </a:p>
+        </p:txBody>
+      </p:sp>
+      <p:sp>
+        <p:nvSpPr>
+          <p:cNvPr id="9" name="Shape 7"/>
+          <p:cNvSpPr/>
+          <p:nvPr/>
+        </p:nvSpPr>
+        <p:spPr>
+          <a:xfrm>
+            <a:off x="10515600" y="2130552"/>
+            <a:ext cx="868680" cy="493776"/>
+          </a:xfrm>
+          <a:prstGeom prst="roundRect">
+            <a:avLst>
+              <a:gd name="adj" fmla="val 18519"/>
+            </a:avLst>
+          </a:prstGeom>
+          <a:solidFill>
+            <a:srgbClr val="EEF2FB"/>
+          </a:solidFill>
+          <a:ln/>
+        </p:spPr>
+      </p:sp>
+      <p:sp>
+        <p:nvSpPr>
+          <p:cNvPr id="10" name="Text 8"/>
+          <p:cNvSpPr txBox="1"/>
+          <p:nvPr/>
+        </p:nvSpPr>
+        <p:spPr>
+          <a:xfrm>
+            <a:off x="10515600" y="2130552"/>
+            <a:ext cx="868680" cy="493776"/>
+          </a:xfrm>
+          <a:prstGeom prst="rect">
+            <a:avLst/>
+          </a:prstGeom>
+          <a:noFill/>
+          <a:ln/>
+        </p:spPr>
+        <p:txBody>
+          <a:bodyPr wrap="square" lIns="0" tIns="0" rIns="0" bIns="0" rtlCol="0" anchor="ctr"/>
+          <a:lstStyle/>
+          <a:p>
+            <a:pPr algn="ctr" indent="0" marL="0">
+              <a:buNone/>
+            </a:pPr>
+            <a:r>
+              <a:rPr lang="en-US" sz="1500" b="1" dirty="0">
+                <a:solidFill>
+                  <a:srgbClr val="2D63FF"/>
+                </a:solidFill>
+                <a:latin typeface="IBM Plex Mono" pitchFamily="34" charset="0"/>
+                <a:ea typeface="IBM Plex Mono" pitchFamily="34" charset="-122"/>
+                <a:cs typeface="IBM Plex Mono" pitchFamily="34" charset="-120"/>
+              </a:rPr>
+              <a:t>[2]</a:t>
+            </a:r>
+            <a:endParaRPr lang="en-US" sz="1500" dirty="0"/>
+          </a:p>
+        </p:txBody>
+      </p:sp>
+      <p:sp>
+        <p:nvSpPr>
+          <p:cNvPr id="11" name="Shape 9"/>
+          <p:cNvSpPr/>
+          <p:nvPr/>
+        </p:nvSpPr>
+        <p:spPr>
+          <a:xfrm>
+            <a:off x="502920" y="3127248"/>
+            <a:ext cx="11155680" cy="1097280"/>
+          </a:xfrm>
+          <a:prstGeom prst="roundRect">
+            <a:avLst>
+              <a:gd name="adj" fmla="val 10000"/>
+            </a:avLst>
+          </a:prstGeom>
+          <a:solidFill>
+            <a:srgbClr val="FFFFFF"/>
+          </a:solidFill>
+          <a:ln w="15875">
+            <a:solidFill>
+              <a:srgbClr val="D9DEE7"/>
+            </a:solidFill>
+            <a:prstDash val="solid"/>
+          </a:ln>
+        </p:spPr>
+      </p:sp>
+      <p:sp>
+        <p:nvSpPr>
+          <p:cNvPr id="12" name="Text 10"/>
+          <p:cNvSpPr txBox="1"/>
+          <p:nvPr/>
+        </p:nvSpPr>
+        <p:spPr>
+          <a:xfrm>
+            <a:off x="914400" y="3236976"/>
+            <a:ext cx="9418320" cy="877824"/>
+          </a:xfrm>
+          <a:prstGeom prst="rect">
+            <a:avLst/>
+          </a:prstGeom>
+          <a:noFill/>
+          <a:ln/>
+        </p:spPr>
+        <p:txBody>
+          <a:bodyPr wrap="square" lIns="0" tIns="0" rIns="0" bIns="0" rtlCol="0" anchor="ctr"/>
+          <a:lstStyle/>
+          <a:p>
+            <a:pPr indent="0" marL="0">
+              <a:lnSpc>
+                <a:spcPct val="118000"/>
+              </a:lnSpc>
+              <a:buNone/>
+            </a:pPr>
+            <a:r>
+              <a:rPr lang="en-US" sz="1700" dirty="0">
+                <a:solidFill>
+                  <a:srgbClr val="101828"/>
+                </a:solidFill>
+                <a:latin typeface="IBM Plex Sans" pitchFamily="34" charset="0"/>
+                <a:ea typeface="IBM Plex Sans" pitchFamily="34" charset="-122"/>
+                <a:cs typeface="IBM Plex Sans" pitchFamily="34" charset="-120"/>
+              </a:rPr>
+              <a:t>Explain why an attack from a botnet is harder to block than one from a single computer.</a:t>
+            </a:r>
+            <a:endParaRPr lang="en-US" sz="1700" dirty="0"/>
+          </a:p>
+        </p:txBody>
+      </p:sp>
+      <p:sp>
+        <p:nvSpPr>
+          <p:cNvPr id="13" name="Shape 11"/>
+          <p:cNvSpPr/>
+          <p:nvPr/>
+        </p:nvSpPr>
+        <p:spPr>
+          <a:xfrm>
+            <a:off x="10515600" y="3429000"/>
+            <a:ext cx="868680" cy="493776"/>
+          </a:xfrm>
+          <a:prstGeom prst="roundRect">
+            <a:avLst>
+              <a:gd name="adj" fmla="val 18519"/>
+            </a:avLst>
+          </a:prstGeom>
+          <a:solidFill>
+            <a:srgbClr val="EEF2FB"/>
+          </a:solidFill>
+          <a:ln/>
+        </p:spPr>
+      </p:sp>
+      <p:sp>
+        <p:nvSpPr>
+          <p:cNvPr id="14" name="Text 12"/>
+          <p:cNvSpPr txBox="1"/>
+          <p:nvPr/>
+        </p:nvSpPr>
+        <p:spPr>
+          <a:xfrm>
+            <a:off x="10515600" y="3429000"/>
+            <a:ext cx="868680" cy="493776"/>
+          </a:xfrm>
+          <a:prstGeom prst="rect">
+            <a:avLst/>
+          </a:prstGeom>
+          <a:noFill/>
+          <a:ln/>
+        </p:spPr>
+        <p:txBody>
+          <a:bodyPr wrap="square" lIns="0" tIns="0" rIns="0" bIns="0" rtlCol="0" anchor="ctr"/>
+          <a:lstStyle/>
+          <a:p>
+            <a:pPr algn="ctr" indent="0" marL="0">
+              <a:buNone/>
+            </a:pPr>
+            <a:r>
+              <a:rPr lang="en-US" sz="1500" b="1" dirty="0">
+                <a:solidFill>
+                  <a:srgbClr val="2D63FF"/>
+                </a:solidFill>
+                <a:latin typeface="IBM Plex Mono" pitchFamily="34" charset="0"/>
+                <a:ea typeface="IBM Plex Mono" pitchFamily="34" charset="-122"/>
+                <a:cs typeface="IBM Plex Mono" pitchFamily="34" charset="-120"/>
+              </a:rPr>
+              <a:t>[3]</a:t>
+            </a:r>
+            <a:endParaRPr lang="en-US" sz="1500" dirty="0"/>
+          </a:p>
+        </p:txBody>
+      </p:sp>
+      <p:sp>
+        <p:nvSpPr>
+          <p:cNvPr id="15" name="Shape 13"/>
+          <p:cNvSpPr/>
+          <p:nvPr/>
+        </p:nvSpPr>
+        <p:spPr>
+          <a:xfrm>
+            <a:off x="502920" y="4425696"/>
+            <a:ext cx="11155680" cy="1097280"/>
+          </a:xfrm>
+          <a:prstGeom prst="roundRect">
+            <a:avLst>
+              <a:gd name="adj" fmla="val 10000"/>
+            </a:avLst>
+          </a:prstGeom>
+          <a:solidFill>
+            <a:srgbClr val="FFFFFF"/>
+          </a:solidFill>
+          <a:ln w="15875">
+            <a:solidFill>
+              <a:srgbClr val="D9DEE7"/>
+            </a:solidFill>
+            <a:prstDash val="solid"/>
+          </a:ln>
+        </p:spPr>
+      </p:sp>
+      <p:sp>
+        <p:nvSpPr>
+          <p:cNvPr id="16" name="Text 14"/>
+          <p:cNvSpPr txBox="1"/>
+          <p:nvPr/>
+        </p:nvSpPr>
+        <p:spPr>
+          <a:xfrm>
+            <a:off x="914400" y="4535424"/>
+            <a:ext cx="9418320" cy="877824"/>
+          </a:xfrm>
+          <a:prstGeom prst="rect">
+            <a:avLst/>
+          </a:prstGeom>
+          <a:noFill/>
+          <a:ln/>
+        </p:spPr>
+        <p:txBody>
+          <a:bodyPr wrap="square" lIns="0" tIns="0" rIns="0" bIns="0" rtlCol="0" anchor="ctr"/>
+          <a:lstStyle/>
+          <a:p>
+            <a:pPr indent="0" marL="0">
+              <a:lnSpc>
+                <a:spcPct val="118000"/>
+              </a:lnSpc>
+              <a:buNone/>
+            </a:pPr>
+            <a:r>
+              <a:rPr lang="en-US" sz="1700" dirty="0">
+                <a:solidFill>
+                  <a:srgbClr val="101828"/>
+                </a:solidFill>
+                <a:latin typeface="IBM Plex Sans" pitchFamily="34" charset="0"/>
+                <a:ea typeface="IBM Plex Sans" pitchFamily="34" charset="-122"/>
+                <a:cs typeface="IBM Plex Sans" pitchFamily="34" charset="-120"/>
+              </a:rPr>
+              <a:t>Describe two measures that reduce the impact of a DDoS attack on a website.</a:t>
+            </a:r>
+            <a:endParaRPr lang="en-US" sz="1700" dirty="0"/>
+          </a:p>
+        </p:txBody>
+      </p:sp>
+      <p:sp>
+        <p:nvSpPr>
+          <p:cNvPr id="17" name="Shape 15"/>
+          <p:cNvSpPr/>
+          <p:nvPr/>
+        </p:nvSpPr>
+        <p:spPr>
+          <a:xfrm>
+            <a:off x="10515600" y="4727448"/>
+            <a:ext cx="868680" cy="493776"/>
+          </a:xfrm>
+          <a:prstGeom prst="roundRect">
+            <a:avLst>
+              <a:gd name="adj" fmla="val 18519"/>
+            </a:avLst>
+          </a:prstGeom>
+          <a:solidFill>
+            <a:srgbClr val="EEF2FB"/>
+          </a:solidFill>
+          <a:ln/>
+        </p:spPr>
+      </p:sp>
+      <p:sp>
+        <p:nvSpPr>
+          <p:cNvPr id="18" name="Text 16"/>
+          <p:cNvSpPr txBox="1"/>
+          <p:nvPr/>
+        </p:nvSpPr>
+        <p:spPr>
+          <a:xfrm>
+            <a:off x="10515600" y="4727448"/>
+            <a:ext cx="868680" cy="493776"/>
+          </a:xfrm>
+          <a:prstGeom prst="rect">
+            <a:avLst/>
+          </a:prstGeom>
+          <a:noFill/>
+          <a:ln/>
+        </p:spPr>
+        <p:txBody>
+          <a:bodyPr wrap="square" lIns="0" tIns="0" rIns="0" bIns="0" rtlCol="0" anchor="ctr"/>
+          <a:lstStyle/>
+          <a:p>
+            <a:pPr algn="ctr" indent="0" marL="0">
+              <a:buNone/>
+            </a:pPr>
+            <a:r>
+              <a:rPr lang="en-US" sz="1500" b="1" dirty="0">
+                <a:solidFill>
+                  <a:srgbClr val="2D63FF"/>
+                </a:solidFill>
+                <a:latin typeface="IBM Plex Mono" pitchFamily="34" charset="0"/>
+                <a:ea typeface="IBM Plex Mono" pitchFamily="34" charset="-122"/>
+                <a:cs typeface="IBM Plex Mono" pitchFamily="34" charset="-120"/>
+              </a:rPr>
+              <a:t>[4]</a:t>
+            </a:r>
+            <a:endParaRPr lang="en-US" sz="1500" dirty="0"/>
+          </a:p>
+        </p:txBody>
+      </p:sp>
+    </p:spTree>
+  </p:cSld>
+  <p:clrMapOvr>
+    <a:masterClrMapping/>
+  </p:clrMapOvr>
+</p:sld>
+</file>
+
+<file path=ppt/slides/slide15.xml><?xml version="1.0" encoding="utf-8"?>
+<p:sld xmlns:a="http://schemas.openxmlformats.org/drawingml/2006/main" xmlns:r="http://schemas.openxmlformats.org/officeDocument/2006/relationships" xmlns:p="http://schemas.openxmlformats.org/presentationml/2006/main">
+  <p:cSld name="Slide 15">
     <p:bg>
       <p:bgPr>
         <a:solidFill>
